--- a/SecureShop_Presentation.pptx
+++ b/SecureShop_Presentation.pptx
@@ -4,6 +4,9 @@
   <p:sldMasterIdLst>
     <p:sldMasterId id="2147483648" r:id="rId1"/>
   </p:sldMasterIdLst>
+  <p:notesMasterIdLst>
+    <p:notesMasterId r:id="rId10"/>
+  </p:notesMasterIdLst>
   <p:sldIdLst>
     <p:sldId id="256" r:id="rId2"/>
     <p:sldId id="257" r:id="rId3"/>
@@ -14,9 +17,6 @@
     <p:sldId id="262" r:id="rId8"/>
     <p:sldId id="263" r:id="rId9"/>
   </p:sldIdLst>
-  <p:notesMasterIdLst>
-    <p:notesMasterId r:id="rId10"/>
-  </p:notesMasterIdLst>
   <p:sldSz cx="12192000" cy="6858000"/>
   <p:notesSz cx="6858000" cy="12192000"/>
   <p:defaultTextStyle>
@@ -111,13 +111,20 @@
       </a:defRPr>
     </a:lvl9pPr>
   </p:defaultTextStyle>
+  <p:extLst>
+    <p:ext uri="{EFAFB233-063F-42B5-8137-9DF3F51BA10A}">
+      <p15:sldGuideLst xmlns:p15="http://schemas.microsoft.com/office/powerpoint/2012/main"/>
+    </p:ext>
+  </p:extLst>
 </p:presentation>
 </file>
 
 <file path=ppt/charts/chart1.xml><?xml version="1.0" encoding="utf-8"?>
-<c:chartSpace xmlns:c="http://schemas.openxmlformats.org/drawingml/2006/chart" xmlns:a="http://schemas.openxmlformats.org/drawingml/2006/main" xmlns:r="http://schemas.openxmlformats.org/officeDocument/2006/relationships">
+<c:chartSpace xmlns:c="http://schemas.openxmlformats.org/drawingml/2006/chart" xmlns:a="http://schemas.openxmlformats.org/drawingml/2006/main" xmlns:r="http://schemas.openxmlformats.org/officeDocument/2006/relationships" xmlns:c16r2="http://schemas.microsoft.com/office/drawing/2015/06/chart">
   <c:date1904 val="0"/>
+  <c:lang val="en-US"/>
   <c:roundedCorners val="1"/>
+  <c:style val="2"/>
   <c:chart>
     <c:title>
       <c:tx>
@@ -134,7 +141,7 @@
               </a:defRPr>
             </a:pPr>
             <a:r>
-              <a:rPr sz="1300" b="0" i="0" u="none" strike="noStrike">
+              <a:rPr lang="en-PH" sz="1300" b="0" i="0" u="none" strike="noStrike">
                 <a:solidFill>
                   <a:srgbClr val="1B1F1D"/>
                 </a:solidFill>
@@ -145,7 +152,6 @@
           </a:p>
         </c:rich>
       </c:tx>
-      <c:layout/>
       <c:overlay val="0"/>
     </c:title>
     <c:autoTitleDeleted val="0"/>
@@ -178,18 +184,26 @@
           <c:invertIfNegative val="0"/>
           <c:dLbls>
             <c:numFmt formatCode="#,##0" sourceLinked="0"/>
+            <c:spPr>
+              <a:noFill/>
+              <a:ln>
+                <a:noFill/>
+              </a:ln>
+              <a:effectLst/>
+            </c:spPr>
             <c:txPr>
               <a:bodyPr/>
               <a:lstStyle/>
               <a:p>
                 <a:pPr>
-                  <a:defRPr b="0" i="0" strike="noStrike" sz="1100" u="none">
+                  <a:defRPr sz="1100" b="0" i="0" u="none" strike="noStrike">
                     <a:solidFill>
                       <a:srgbClr val="1B1F1D"/>
                     </a:solidFill>
                     <a:latin typeface="Arial"/>
                   </a:defRPr>
                 </a:pPr>
+                <a:endParaRPr lang="en-US"/>
               </a:p>
             </c:txPr>
             <c:showLegendKey val="0"/>
@@ -199,28 +213,31 @@
             <c:showPercent val="0"/>
             <c:showBubbleSize val="0"/>
             <c:showLeaderLines val="0"/>
+            <c:extLst>
+              <c:ext xmlns:c15="http://schemas.microsoft.com/office/drawing/2012/chart" uri="{CE6537A1-D6FC-4f65-9D91-7224C49458BB}">
+                <c15:showLeaderLines val="0"/>
+              </c:ext>
+            </c:extLst>
           </c:dLbls>
           <c:cat>
-            <c:multiLvlStrRef>
+            <c:strRef>
               <c:f>Sheet1!$A$2:$A$5</c:f>
-              <c:multiLvlStrCache>
+              <c:strCache>
                 <c:ptCount val="4"/>
-                <c:lvl>
-                  <c:pt idx="0">
-                    <c:v>accounts</c:v>
-                  </c:pt>
-                  <c:pt idx="1">
-                    <c:v>store</c:v>
-                  </c:pt>
-                  <c:pt idx="2">
-                    <c:v>cart</c:v>
-                  </c:pt>
-                  <c:pt idx="3">
-                    <c:v>orders</c:v>
-                  </c:pt>
-                </c:lvl>
-              </c:multiLvlStrCache>
-            </c:multiLvlStrRef>
+                <c:pt idx="0">
+                  <c:v>accounts</c:v>
+                </c:pt>
+                <c:pt idx="1">
+                  <c:v>store</c:v>
+                </c:pt>
+                <c:pt idx="2">
+                  <c:v>cart</c:v>
+                </c:pt>
+                <c:pt idx="3">
+                  <c:v>orders</c:v>
+                </c:pt>
+              </c:strCache>
+            </c:strRef>
           </c:cat>
           <c:val>
             <c:numRef>
@@ -243,36 +260,23 @@
               </c:numCache>
             </c:numRef>
           </c:val>
+          <c:extLst>
+            <c:ext xmlns:c16="http://schemas.microsoft.com/office/drawing/2014/chart" uri="{C3380CC4-5D6E-409C-BE32-E72D297353CC}">
+              <c16:uniqueId val="{00000000-4764-41FF-AE1E-BF827FDC25D9}"/>
+            </c:ext>
+          </c:extLst>
         </c:ser>
         <c:dLbls>
-          <c:numFmt formatCode="#,##0" sourceLinked="0"/>
-          <c:txPr>
-            <a:bodyPr/>
-            <a:lstStyle/>
-            <a:p>
-              <a:pPr>
-                <a:defRPr b="0" i="0" strike="noStrike" sz="1100" u="none">
-                  <a:solidFill>
-                    <a:srgbClr val="1B1F1D"/>
-                  </a:solidFill>
-                  <a:latin typeface="Arial"/>
-                </a:defRPr>
-              </a:pPr>
-            </a:p>
-          </c:txPr>
           <c:showLegendKey val="0"/>
           <c:showVal val="1"/>
           <c:showCatName val="0"/>
           <c:showSerName val="0"/>
           <c:showPercent val="0"/>
           <c:showBubbleSize val="0"/>
-          <c:showLeaderLines val="0"/>
         </c:dLbls>
         <c:gapWidth val="40"/>
-        <c:overlap val="0"/>
         <c:axId val="2094734554"/>
         <c:axId val="2094734552"/>
-        <c:axId val="2094734556"/>
       </c:barChart>
       <c:catAx>
         <c:axId val="2094734554"/>
@@ -313,6 +317,7 @@
         <c:crosses val="autoZero"/>
         <c:auto val="1"/>
         <c:lblAlgn val="ctr"/>
+        <c:lblOffset val="100"/>
         <c:noMultiLvlLbl val="1"/>
       </c:catAx>
       <c:valAx>
@@ -375,6 +380,7 @@
     </c:plotArea>
     <c:plotVisOnly val="1"/>
     <c:dispBlanksAs val="span"/>
+    <c:showDLblsOverMax val="1"/>
   </c:chart>
   <c:spPr>
     <a:noFill/>
@@ -390,9 +396,11 @@
 </file>
 
 <file path=ppt/charts/chart2.xml><?xml version="1.0" encoding="utf-8"?>
-<c:chartSpace xmlns:c="http://schemas.openxmlformats.org/drawingml/2006/chart" xmlns:a="http://schemas.openxmlformats.org/drawingml/2006/main" xmlns:r="http://schemas.openxmlformats.org/officeDocument/2006/relationships">
+<c:chartSpace xmlns:c="http://schemas.openxmlformats.org/drawingml/2006/chart" xmlns:a="http://schemas.openxmlformats.org/drawingml/2006/main" xmlns:r="http://schemas.openxmlformats.org/officeDocument/2006/relationships" xmlns:c16r2="http://schemas.microsoft.com/office/drawing/2015/06/chart">
   <c:date1904 val="0"/>
+  <c:lang val="en-US"/>
   <c:roundedCorners val="1"/>
+  <c:style val="2"/>
   <c:chart>
     <c:autoTitleDeleted val="1"/>
     <c:plotArea>
@@ -435,6 +443,11 @@
               </a:solidFill>
               <a:effectLst/>
             </c:spPr>
+            <c:extLst>
+              <c:ext xmlns:c16="http://schemas.microsoft.com/office/drawing/2014/chart" uri="{C3380CC4-5D6E-409C-BE32-E72D297353CC}">
+                <c16:uniqueId val="{00000001-3620-47F1-8FDC-691CC726B0FF}"/>
+              </c:ext>
+            </c:extLst>
           </c:dPt>
           <c:dPt>
             <c:idx val="1"/>
@@ -445,81 +458,12 @@
               </a:solidFill>
               <a:effectLst/>
             </c:spPr>
+            <c:extLst>
+              <c:ext xmlns:c16="http://schemas.microsoft.com/office/drawing/2014/chart" uri="{C3380CC4-5D6E-409C-BE32-E72D297353CC}">
+                <c16:uniqueId val="{00000003-3620-47F1-8FDC-691CC726B0FF}"/>
+              </c:ext>
+            </c:extLst>
           </c:dPt>
-          <c:dLbls>
-            <c:dLbl>
-              <c:idx val="0"/>
-              <c:numFmt formatCode="General" sourceLinked="0"/>
-              <c:spPr/>
-              <c:txPr>
-                <a:bodyPr/>
-                <a:lstStyle/>
-                <a:p>
-                  <a:pPr>
-                    <a:defRPr sz="1200" b="0" i="0" u="none" strike="noStrike">
-                      <a:solidFill>
-                        <a:srgbClr val="FFFFFF"/>
-                      </a:solidFill>
-                      <a:latin typeface="Arial"/>
-                    </a:defRPr>
-                  </a:pPr>
-                </a:p>
-              </c:txPr>
-              <c:showLegendKey val="0"/>
-              <c:showVal val="0"/>
-              <c:showCatName val="0"/>
-              <c:showSerName val="0"/>
-              <c:showPercent val="0"/>
-              <c:showBubbleSize val="0"/>
-            </c:dLbl>
-            <c:dLbl>
-              <c:idx val="1"/>
-              <c:numFmt formatCode="General" sourceLinked="0"/>
-              <c:spPr/>
-              <c:txPr>
-                <a:bodyPr/>
-                <a:lstStyle/>
-                <a:p>
-                  <a:pPr>
-                    <a:defRPr sz="1200" b="0" i="0" u="none" strike="noStrike">
-                      <a:solidFill>
-                        <a:srgbClr val="FFFFFF"/>
-                      </a:solidFill>
-                      <a:latin typeface="Arial"/>
-                    </a:defRPr>
-                  </a:pPr>
-                </a:p>
-              </c:txPr>
-              <c:showLegendKey val="0"/>
-              <c:showVal val="0"/>
-              <c:showCatName val="0"/>
-              <c:showSerName val="0"/>
-              <c:showPercent val="0"/>
-              <c:showBubbleSize val="0"/>
-            </c:dLbl>
-            <c:numFmt formatCode="General" sourceLinked="0"/>
-            <c:txPr>
-              <a:bodyPr/>
-              <a:lstStyle/>
-              <a:p>
-                <a:pPr>
-                  <a:defRPr sz="1800" b="0" i="0" u="none" strike="noStrike">
-                    <a:solidFill>
-                      <a:srgbClr val="000000"/>
-                    </a:solidFill>
-                    <a:latin typeface="Arial"/>
-                  </a:defRPr>
-                </a:pPr>
-              </a:p>
-            </c:txPr>
-            <c:showLegendKey val="0"/>
-            <c:showVal val="0"/>
-            <c:showCatName val="1"/>
-            <c:showSerName val="0"/>
-            <c:showPercent val="1"/>
-            <c:showBubbleSize val="0"/>
-            <c:showLeaderLines val="0"/>
-          </c:dLbls>
           <c:cat>
             <c:strRef>
               <c:f>Sheet1!$A$2:$A$3</c:f>
@@ -538,6 +482,7 @@
             <c:numRef>
               <c:f>Sheet1!$B$2:$B$3</c:f>
               <c:numCache>
+                <c:formatCode>General</c:formatCode>
                 <c:ptCount val="2"/>
                 <c:pt idx="0">
                   <c:v>16</c:v>
@@ -548,7 +493,21 @@
               </c:numCache>
             </c:numRef>
           </c:val>
+          <c:extLst>
+            <c:ext xmlns:c16="http://schemas.microsoft.com/office/drawing/2014/chart" uri="{C3380CC4-5D6E-409C-BE32-E72D297353CC}">
+              <c16:uniqueId val="{00000004-3620-47F1-8FDC-691CC726B0FF}"/>
+            </c:ext>
+          </c:extLst>
         </c:ser>
+        <c:dLbls>
+          <c:showLegendKey val="0"/>
+          <c:showVal val="0"/>
+          <c:showCatName val="0"/>
+          <c:showSerName val="0"/>
+          <c:showPercent val="0"/>
+          <c:showBubbleSize val="0"/>
+          <c:showLeaderLines val="0"/>
+        </c:dLbls>
         <c:firstSliceAng val="0"/>
         <c:holeSize val="50"/>
       </c:doughnutChart>
@@ -580,6 +539,7 @@
     </c:legend>
     <c:plotVisOnly val="1"/>
     <c:dispBlanksAs val="span"/>
+    <c:showDLblsOverMax val="1"/>
   </c:chart>
   <c:spPr>
     <a:noFill/>
@@ -616,234 +576,10 @@
           <a:chExt cx="0" cy="0"/>
         </a:xfrm>
       </p:grpSpPr>
-      <p:sp>
-        <p:nvSpPr>
-          <p:cNvPr id="2" name="Header Placeholder 1"/>
-          <p:cNvSpPr>
-            <a:spLocks noGrp="1"/>
-          </p:cNvSpPr>
-          <p:nvPr>
-            <p:ph type="hdr" sz="quarter"/>
-          </p:nvPr>
-        </p:nvSpPr>
-        <p:spPr>
-          <a:xfrm>
-            <a:off x="0" y="0"/>
-            <a:ext cx="2971800" cy="458788"/>
-          </a:xfrm>
-          <a:prstGeom prst="rect">
-            <a:avLst/>
-          </a:prstGeom>
-        </p:spPr>
-        <p:txBody>
-          <a:bodyPr vert="horz" lIns="91440" tIns="45720" rIns="91440" bIns="45720" rtlCol="0"/>
-          <a:lstStyle>
-            <a:lvl1pPr algn="l">
-              <a:defRPr sz="1200"/>
-            </a:lvl1pPr>
-          </a:lstStyle>
-          <a:p>
-            <a:endParaRPr lang="en-US"/>
-          </a:p>
-        </p:txBody>
-      </p:sp>
-      <p:sp>
-        <p:nvSpPr>
-          <p:cNvPr id="3" name="Date Placeholder 2"/>
-          <p:cNvSpPr>
-            <a:spLocks noGrp="1"/>
-          </p:cNvSpPr>
-          <p:nvPr>
-            <p:ph type="dt" idx="1"/>
-          </p:nvPr>
-        </p:nvSpPr>
-        <p:spPr>
-          <a:xfrm>
-            <a:off x="3884613" y="0"/>
-            <a:ext cx="2971800" cy="458788"/>
-          </a:xfrm>
-          <a:prstGeom prst="rect">
-            <a:avLst/>
-          </a:prstGeom>
-        </p:spPr>
-        <p:txBody>
-          <a:bodyPr vert="horz" lIns="91440" tIns="45720" rIns="91440" bIns="45720" rtlCol="0"/>
-          <a:lstStyle>
-            <a:lvl1pPr algn="r">
-              <a:defRPr sz="1200"/>
-            </a:lvl1pPr>
-          </a:lstStyle>
-          <a:p>
-            <a:fld id="{5282F153-3F37-0F45-9E97-73ACFA13230C}" type="datetimeFigureOut">
-              <a:rPr lang="en-US"/>
-              <a:t>7/23/19</a:t>
-            </a:fld>
-            <a:endParaRPr lang="en-US"/>
-          </a:p>
-        </p:txBody>
-      </p:sp>
-      <p:sp>
-        <p:nvSpPr>
-          <p:cNvPr id="4" name="Slide Image Placeholder 3"/>
-          <p:cNvSpPr>
-            <a:spLocks noGrp="1" noRot="1" noChangeAspect="1"/>
-          </p:cNvSpPr>
-          <p:nvPr>
-            <p:ph type="sldImg" idx="2"/>
-          </p:nvPr>
-        </p:nvSpPr>
-        <p:spPr>
-          <a:xfrm>
-            <a:off x="685800" y="1143000"/>
-            <a:ext cx="5486400" cy="3086100"/>
-          </a:xfrm>
-          <a:prstGeom prst="rect">
-            <a:avLst/>
-          </a:prstGeom>
-          <a:noFill/>
-          <a:ln w="12700">
-            <a:solidFill>
-              <a:prstClr val="black"/>
-            </a:solidFill>
-          </a:ln>
-        </p:spPr>
-        <p:txBody>
-          <a:bodyPr vert="horz" lIns="91440" tIns="45720" rIns="91440" bIns="45720" rtlCol="0" anchor="ctr"/>
-          <a:lstStyle/>
-          <a:p>
-            <a:endParaRPr lang="en-US"/>
-          </a:p>
-        </p:txBody>
-      </p:sp>
-      <p:sp>
-        <p:nvSpPr>
-          <p:cNvPr id="5" name="Notes Placeholder 4"/>
-          <p:cNvSpPr>
-            <a:spLocks noGrp="1"/>
-          </p:cNvSpPr>
-          <p:nvPr>
-            <p:ph type="body" sz="quarter" idx="3"/>
-          </p:nvPr>
-        </p:nvSpPr>
-        <p:spPr>
-          <a:xfrm>
-            <a:off x="685800" y="4400550"/>
-            <a:ext cx="5486400" cy="3600450"/>
-          </a:xfrm>
-          <a:prstGeom prst="rect">
-            <a:avLst/>
-          </a:prstGeom>
-        </p:spPr>
-        <p:txBody>
-          <a:bodyPr vert="horz" lIns="91440" tIns="45720" rIns="91440" bIns="45720" rtlCol="0"/>
-          <a:lstStyle/>
-          <a:p>
-            <a:pPr lvl="0"/>
-            <a:r>
-              <a:rPr lang="en-US"/>
-              <a:t>Click to edit Master text styles</a:t>
-            </a:r>
-          </a:p>
-          <a:p>
-            <a:pPr lvl="1"/>
-            <a:r>
-              <a:rPr lang="en-US"/>
-              <a:t>Second level</a:t>
-            </a:r>
-          </a:p>
-          <a:p>
-            <a:pPr lvl="2"/>
-            <a:r>
-              <a:rPr lang="en-US"/>
-              <a:t>Third level</a:t>
-            </a:r>
-          </a:p>
-          <a:p>
-            <a:pPr lvl="3"/>
-            <a:r>
-              <a:rPr lang="en-US"/>
-              <a:t>Fourth level</a:t>
-            </a:r>
-          </a:p>
-          <a:p>
-            <a:pPr lvl="4"/>
-            <a:r>
-              <a:rPr lang="en-US"/>
-              <a:t>Fifth level</a:t>
-            </a:r>
-          </a:p>
-        </p:txBody>
-      </p:sp>
-      <p:sp>
-        <p:nvSpPr>
-          <p:cNvPr id="6" name="Footer Placeholder 5"/>
-          <p:cNvSpPr>
-            <a:spLocks noGrp="1"/>
-          </p:cNvSpPr>
-          <p:nvPr>
-            <p:ph type="ftr" sz="quarter" idx="4"/>
-          </p:nvPr>
-        </p:nvSpPr>
-        <p:spPr>
-          <a:xfrm>
-            <a:off x="0" y="8685213"/>
-            <a:ext cx="2971800" cy="458787"/>
-          </a:xfrm>
-          <a:prstGeom prst="rect">
-            <a:avLst/>
-          </a:prstGeom>
-        </p:spPr>
-        <p:txBody>
-          <a:bodyPr vert="horz" lIns="91440" tIns="45720" rIns="91440" bIns="45720" rtlCol="0" anchor="b"/>
-          <a:lstStyle>
-            <a:lvl1pPr algn="l">
-              <a:defRPr sz="1200"/>
-            </a:lvl1pPr>
-          </a:lstStyle>
-          <a:p>
-            <a:endParaRPr lang="en-US"/>
-          </a:p>
-        </p:txBody>
-      </p:sp>
-      <p:sp>
-        <p:nvSpPr>
-          <p:cNvPr id="7" name="Slide Number Placeholder 6"/>
-          <p:cNvSpPr>
-            <a:spLocks noGrp="1"/>
-          </p:cNvSpPr>
-          <p:nvPr>
-            <p:ph type="sldNum" sz="quarter" idx="5"/>
-          </p:nvPr>
-        </p:nvSpPr>
-        <p:spPr>
-          <a:xfrm>
-            <a:off x="3884613" y="8685213"/>
-            <a:ext cx="2971800" cy="458787"/>
-          </a:xfrm>
-          <a:prstGeom prst="rect">
-            <a:avLst/>
-          </a:prstGeom>
-        </p:spPr>
-        <p:txBody>
-          <a:bodyPr vert="horz" lIns="91440" tIns="45720" rIns="91440" bIns="45720" rtlCol="0" anchor="b"/>
-          <a:lstStyle>
-            <a:lvl1pPr algn="r">
-              <a:defRPr sz="1200"/>
-            </a:lvl1pPr>
-          </a:lstStyle>
-          <a:p>
-            <a:fld id="{CE5E9CC1-C706-0F49-92D6-E571CC5EEA8F}" type="slidenum">
-              <a:rPr lang="en-US"/>
-              <a:t>‹#›</a:t>
-            </a:fld>
-            <a:endParaRPr lang="en-US"/>
-          </a:p>
-        </p:txBody>
-      </p:sp>
     </p:spTree>
     <p:extLst>
       <p:ext uri="{BB962C8B-B14F-4D97-AF65-F5344CB8AC3E}">
-        <p14:creationId xmlns:p14="http://schemas.microsoft.com/office/powerpoint/2010/main" val="1024086991"/>
+        <p14:creationId xmlns:p14="http://schemas.microsoft.com/office/powerpoint/2010/main" val="1231897983"/>
       </p:ext>
     </p:extLst>
   </p:cSld>
@@ -987,10 +723,6 @@
           <a:bodyPr/>
           <a:lstStyle/>
           <a:p>
-            <a:r>
-              <a:rPr lang="en-US" dirty="0"/>
-              <a:t/>
-            </a:r>
             <a:endParaRPr lang="en-US" dirty="0"/>
           </a:p>
         </p:txBody>
@@ -1075,10 +807,6 @@
           <a:bodyPr/>
           <a:lstStyle/>
           <a:p>
-            <a:r>
-              <a:rPr lang="en-US" dirty="0"/>
-              <a:t/>
-            </a:r>
             <a:endParaRPr lang="en-US" dirty="0"/>
           </a:p>
         </p:txBody>
@@ -1163,10 +891,6 @@
           <a:bodyPr/>
           <a:lstStyle/>
           <a:p>
-            <a:r>
-              <a:rPr lang="en-US" dirty="0"/>
-              <a:t/>
-            </a:r>
             <a:endParaRPr lang="en-US" dirty="0"/>
           </a:p>
         </p:txBody>
@@ -1251,10 +975,6 @@
           <a:bodyPr/>
           <a:lstStyle/>
           <a:p>
-            <a:r>
-              <a:rPr lang="en-US" dirty="0"/>
-              <a:t/>
-            </a:r>
             <a:endParaRPr lang="en-US" dirty="0"/>
           </a:p>
         </p:txBody>
@@ -1339,10 +1059,6 @@
           <a:bodyPr/>
           <a:lstStyle/>
           <a:p>
-            <a:r>
-              <a:rPr lang="en-US" dirty="0"/>
-              <a:t/>
-            </a:r>
             <a:endParaRPr lang="en-US" dirty="0"/>
           </a:p>
         </p:txBody>
@@ -1427,10 +1143,6 @@
           <a:bodyPr/>
           <a:lstStyle/>
           <a:p>
-            <a:r>
-              <a:rPr lang="en-US" dirty="0"/>
-              <a:t/>
-            </a:r>
             <a:endParaRPr lang="en-US" dirty="0"/>
           </a:p>
         </p:txBody>
@@ -1515,10 +1227,6 @@
           <a:bodyPr/>
           <a:lstStyle/>
           <a:p>
-            <a:r>
-              <a:rPr lang="en-US" dirty="0"/>
-              <a:t/>
-            </a:r>
             <a:endParaRPr lang="en-US" dirty="0"/>
           </a:p>
         </p:txBody>
@@ -1603,10 +1311,6 @@
           <a:bodyPr/>
           <a:lstStyle/>
           <a:p>
-            <a:r>
-              <a:rPr lang="en-US" dirty="0"/>
-              <a:t/>
-            </a:r>
             <a:endParaRPr lang="en-US" dirty="0"/>
           </a:p>
         </p:txBody>
@@ -1680,6 +1384,11 @@
 <file path=ppt/slideMasters/slideMaster1.xml><?xml version="1.0" encoding="utf-8"?>
 <p:sldMaster xmlns:a="http://schemas.openxmlformats.org/drawingml/2006/main" xmlns:r="http://schemas.openxmlformats.org/officeDocument/2006/relationships" xmlns:p="http://schemas.openxmlformats.org/presentationml/2006/main">
   <p:cSld>
+    <p:bg>
+      <p:bgRef idx="1001">
+        <a:schemeClr val="bg1"/>
+      </p:bgRef>
+    </p:bg>
     <p:spTree>
       <p:nvGrpSpPr>
         <p:cNvPr id="1" name=""/>
@@ -1962,6 +1671,7 @@
         <a:solidFill>
           <a:srgbClr val="16503C"/>
         </a:solidFill>
+        <a:effectLst/>
       </p:bgPr>
     </p:bg>
     <p:spTree>
@@ -2063,11 +1773,11 @@
           <a:bodyPr wrap="square" rtlCol="0" anchor="ctr"/>
           <a:lstStyle/>
           <a:p>
-            <a:pPr indent="0" marL="0">
-              <a:buNone/>
-            </a:pPr>
-            <a:r>
-              <a:rPr lang="en-US" sz="5400" b="1" spc="100" kern="0" dirty="0">
+            <a:pPr marL="0" indent="0">
+              <a:buNone/>
+            </a:pPr>
+            <a:r>
+              <a:rPr lang="en-US" sz="5400" b="1" kern="0" spc="100" dirty="0">
                 <a:solidFill>
                   <a:srgbClr val="FFFFFF"/>
                 </a:solidFill>
@@ -2102,7 +1812,7 @@
           <a:bodyPr wrap="square" rtlCol="0" anchor="ctr"/>
           <a:lstStyle/>
           <a:p>
-            <a:pPr indent="0" marL="0">
+            <a:pPr marL="0" indent="0">
               <a:buNone/>
             </a:pPr>
             <a:r>
@@ -2164,7 +1874,7 @@
           <a:bodyPr wrap="square" rtlCol="0" anchor="ctr"/>
           <a:lstStyle/>
           <a:p>
-            <a:pPr indent="0" marL="0">
+            <a:pPr marL="0" indent="0">
               <a:lnSpc>
                 <a:spcPts val="2000"/>
               </a:lnSpc>
@@ -2179,12 +1889,34 @@
                 <a:ea typeface="Calibri" pitchFamily="34" charset="-122"/>
                 <a:cs typeface="Calibri" pitchFamily="34" charset="-120"/>
               </a:rPr>
-              <a:t>A Django platform built with OWASP Top 10 mitigations, Stripe payments,</a:t>
+              <a:t>A Django platform built with OWASP Top 10 mitigations, </a:t>
+            </a:r>
+            <a:r>
+              <a:rPr lang="en-US" sz="1400" dirty="0" err="1">
+                <a:solidFill>
+                  <a:srgbClr val="CFE3D8"/>
+                </a:solidFill>
+                <a:latin typeface="Calibri" pitchFamily="34" charset="0"/>
+                <a:ea typeface="Calibri" pitchFamily="34" charset="-122"/>
+                <a:cs typeface="Calibri" pitchFamily="34" charset="-120"/>
+              </a:rPr>
+              <a:t>Paymongo</a:t>
+            </a:r>
+            <a:r>
+              <a:rPr lang="en-US" sz="1400" dirty="0">
+                <a:solidFill>
+                  <a:srgbClr val="CFE3D8"/>
+                </a:solidFill>
+                <a:latin typeface="Calibri" pitchFamily="34" charset="0"/>
+                <a:ea typeface="Calibri" pitchFamily="34" charset="-122"/>
+                <a:cs typeface="Calibri" pitchFamily="34" charset="-120"/>
+              </a:rPr>
+              <a:t> payments,</a:t>
             </a:r>
             <a:endParaRPr lang="en-US" sz="1400" dirty="0"/>
           </a:p>
           <a:p>
-            <a:pPr indent="0" marL="0">
+            <a:pPr marL="0" indent="0">
               <a:lnSpc>
                 <a:spcPts val="2000"/>
               </a:lnSpc>
@@ -2226,7 +1958,7 @@
           <a:bodyPr wrap="square" rtlCol="0" anchor="ctr"/>
           <a:lstStyle/>
           <a:p>
-            <a:pPr indent="0" marL="0">
+            <a:pPr marL="0" indent="0">
               <a:buNone/>
             </a:pPr>
             <a:r>
@@ -2238,7 +1970,29 @@
                 <a:ea typeface="Calibri" pitchFamily="34" charset="-122"/>
                 <a:cs typeface="Calibri" pitchFamily="34" charset="-120"/>
               </a:rPr>
-              <a:t>Capstone Project  •  Django  •  Stripe  •  OWASP Top 10 (2021)</a:t>
+              <a:t>Project  •  Django  •  </a:t>
+            </a:r>
+            <a:r>
+              <a:rPr lang="en-US" sz="1200">
+                <a:solidFill>
+                  <a:srgbClr val="8FB9A6"/>
+                </a:solidFill>
+                <a:latin typeface="Calibri" pitchFamily="34" charset="0"/>
+                <a:ea typeface="Calibri" pitchFamily="34" charset="-122"/>
+                <a:cs typeface="Calibri" pitchFamily="34" charset="-120"/>
+              </a:rPr>
+              <a:t>Paymongo  </a:t>
+            </a:r>
+            <a:r>
+              <a:rPr lang="en-US" sz="1200" dirty="0">
+                <a:solidFill>
+                  <a:srgbClr val="8FB9A6"/>
+                </a:solidFill>
+                <a:latin typeface="Calibri" pitchFamily="34" charset="0"/>
+                <a:ea typeface="Calibri" pitchFamily="34" charset="-122"/>
+                <a:cs typeface="Calibri" pitchFamily="34" charset="-120"/>
+              </a:rPr>
+              <a:t>•  OWASP Top 10 (2021)</a:t>
             </a:r>
             <a:endParaRPr lang="en-US" sz="1200" dirty="0"/>
           </a:p>
@@ -2260,6 +2014,7 @@
         <a:solidFill>
           <a:srgbClr val="FFFFFF"/>
         </a:solidFill>
+        <a:effectLst/>
       </p:bgPr>
     </p:bg>
     <p:spTree>
@@ -2297,11 +2052,11 @@
           <a:bodyPr wrap="square" rtlCol="0" anchor="ctr"/>
           <a:lstStyle/>
           <a:p>
-            <a:pPr indent="0" marL="0">
-              <a:buNone/>
-            </a:pPr>
-            <a:r>
-              <a:rPr lang="en-US" sz="1300" b="1" spc="200" kern="0" dirty="0">
+            <a:pPr marL="0" indent="0">
+              <a:buNone/>
+            </a:pPr>
+            <a:r>
+              <a:rPr lang="en-US" sz="1300" b="1" kern="0" spc="200" dirty="0">
                 <a:solidFill>
                   <a:srgbClr val="1F6F54"/>
                 </a:solidFill>
@@ -2336,7 +2091,7 @@
           <a:bodyPr wrap="square" rtlCol="0" anchor="ctr"/>
           <a:lstStyle/>
           <a:p>
-            <a:pPr indent="0" marL="0">
+            <a:pPr marL="0" indent="0">
               <a:buNone/>
             </a:pPr>
             <a:r>
@@ -2375,7 +2130,7 @@
           <a:bodyPr wrap="square" rtlCol="0" anchor="ctr"/>
           <a:lstStyle/>
           <a:p>
-            <a:pPr indent="0" marL="0">
+            <a:pPr marL="0" indent="0">
               <a:lnSpc>
                 <a:spcPts val="2200"/>
               </a:lnSpc>
@@ -2436,7 +2191,7 @@
           <a:bodyPr wrap="square" rtlCol="0" anchor="ctr"/>
           <a:lstStyle/>
           <a:p>
-            <a:pPr indent="0" marL="0">
+            <a:pPr marL="0" indent="0">
               <a:buNone/>
             </a:pPr>
             <a:r>
@@ -2472,7 +2227,7 @@
           <a:bodyPr wrap="square" rtlCol="0" anchor="ctr"/>
           <a:lstStyle/>
           <a:p>
-            <a:pPr indent="0" marL="0">
+            <a:pPr marL="0" indent="0">
               <a:lnSpc>
                 <a:spcPts val="1900"/>
               </a:lnSpc>
@@ -2533,7 +2288,7 @@
           <a:bodyPr wrap="square" rtlCol="0" anchor="ctr"/>
           <a:lstStyle/>
           <a:p>
-            <a:pPr indent="0" marL="0">
+            <a:pPr marL="0" indent="0">
               <a:buNone/>
             </a:pPr>
             <a:r>
@@ -2569,7 +2324,7 @@
           <a:bodyPr wrap="square" rtlCol="0" anchor="ctr"/>
           <a:lstStyle/>
           <a:p>
-            <a:pPr indent="0" marL="0">
+            <a:pPr marL="0" indent="0">
               <a:lnSpc>
                 <a:spcPts val="1900"/>
               </a:lnSpc>
@@ -2630,7 +2385,7 @@
           <a:bodyPr wrap="square" rtlCol="0" anchor="ctr"/>
           <a:lstStyle/>
           <a:p>
-            <a:pPr indent="0" marL="0">
+            <a:pPr marL="0" indent="0">
               <a:buNone/>
             </a:pPr>
             <a:r>
@@ -2666,7 +2421,7 @@
           <a:bodyPr wrap="square" rtlCol="0" anchor="ctr"/>
           <a:lstStyle/>
           <a:p>
-            <a:pPr indent="0" marL="0">
+            <a:pPr marL="0" indent="0">
               <a:lnSpc>
                 <a:spcPts val="1900"/>
               </a:lnSpc>
@@ -2727,7 +2482,7 @@
           <a:bodyPr wrap="square" rtlCol="0" anchor="ctr"/>
           <a:lstStyle/>
           <a:p>
-            <a:pPr indent="0" marL="0">
+            <a:pPr marL="0" indent="0">
               <a:buNone/>
             </a:pPr>
             <a:r>
@@ -2807,12 +2562,20 @@
               <a:buChar char="•"/>
             </a:pPr>
             <a:r>
+              <a:rPr lang="en-US" sz="1300" dirty="0" err="1">
+                <a:solidFill>
+                  <a:srgbClr val="FFFFFF"/>
+                </a:solidFill>
+              </a:rPr>
+              <a:t>Paymongo</a:t>
+            </a:r>
+            <a:r>
               <a:rPr lang="en-US" sz="1300" dirty="0">
                 <a:solidFill>
                   <a:srgbClr val="FFFFFF"/>
                 </a:solidFill>
               </a:rPr>
-              <a:t>Stripe payment processing API</a:t>
+              <a:t> payment processing API</a:t>
             </a:r>
             <a:endParaRPr lang="en-US" sz="1300" dirty="0"/>
           </a:p>
@@ -2839,7 +2602,7 @@
           <a:bodyPr wrap="square" rtlCol="0" anchor="ctr"/>
           <a:lstStyle/>
           <a:p>
-            <a:pPr algn="r" indent="0" marL="0">
+            <a:pPr marL="0" indent="0" algn="r">
               <a:buNone/>
             </a:pPr>
             <a:r>
@@ -2870,6 +2633,7 @@
         <a:solidFill>
           <a:srgbClr val="FFFFFF"/>
         </a:solidFill>
+        <a:effectLst/>
       </p:bgPr>
     </p:bg>
     <p:spTree>
@@ -2907,11 +2671,11 @@
           <a:bodyPr wrap="square" rtlCol="0" anchor="ctr"/>
           <a:lstStyle/>
           <a:p>
-            <a:pPr indent="0" marL="0">
-              <a:buNone/>
-            </a:pPr>
-            <a:r>
-              <a:rPr lang="en-US" sz="1300" b="1" spc="200" kern="0" dirty="0">
+            <a:pPr marL="0" indent="0">
+              <a:buNone/>
+            </a:pPr>
+            <a:r>
+              <a:rPr lang="en-US" sz="1300" b="1" kern="0" spc="200" dirty="0">
                 <a:solidFill>
                   <a:srgbClr val="1F6F54"/>
                 </a:solidFill>
@@ -2946,7 +2710,7 @@
           <a:bodyPr wrap="square" rtlCol="0" anchor="ctr"/>
           <a:lstStyle/>
           <a:p>
-            <a:pPr indent="0" marL="0">
+            <a:pPr marL="0" indent="0">
               <a:buNone/>
             </a:pPr>
             <a:r>
@@ -3034,7 +2798,7 @@
           <a:bodyPr wrap="square" rtlCol="0" anchor="ctr"/>
           <a:lstStyle/>
           <a:p>
-            <a:pPr algn="ctr" indent="0" marL="0">
+            <a:pPr marL="0" indent="0" algn="ctr">
               <a:buNone/>
             </a:pPr>
             <a:r>
@@ -3070,7 +2834,7 @@
           <a:bodyPr wrap="square" rtlCol="0" anchor="ctr"/>
           <a:lstStyle/>
           <a:p>
-            <a:pPr indent="0" marL="0">
+            <a:pPr marL="0" indent="0">
               <a:lnSpc>
                 <a:spcPts val="1500"/>
               </a:lnSpc>
@@ -3158,7 +2922,7 @@
           <a:bodyPr wrap="square" rtlCol="0" anchor="ctr"/>
           <a:lstStyle/>
           <a:p>
-            <a:pPr algn="ctr" indent="0" marL="0">
+            <a:pPr marL="0" indent="0" algn="ctr">
               <a:buNone/>
             </a:pPr>
             <a:r>
@@ -3194,7 +2958,7 @@
           <a:bodyPr wrap="square" rtlCol="0" anchor="ctr"/>
           <a:lstStyle/>
           <a:p>
-            <a:pPr indent="0" marL="0">
+            <a:pPr marL="0" indent="0">
               <a:lnSpc>
                 <a:spcPts val="1500"/>
               </a:lnSpc>
@@ -3282,7 +3046,7 @@
           <a:bodyPr wrap="square" rtlCol="0" anchor="ctr"/>
           <a:lstStyle/>
           <a:p>
-            <a:pPr algn="ctr" indent="0" marL="0">
+            <a:pPr marL="0" indent="0" algn="ctr">
               <a:buNone/>
             </a:pPr>
             <a:r>
@@ -3318,7 +3082,7 @@
           <a:bodyPr wrap="square" rtlCol="0" anchor="ctr"/>
           <a:lstStyle/>
           <a:p>
-            <a:pPr indent="0" marL="0">
+            <a:pPr marL="0" indent="0">
               <a:lnSpc>
                 <a:spcPts val="1500"/>
               </a:lnSpc>
@@ -3406,7 +3170,7 @@
           <a:bodyPr wrap="square" rtlCol="0" anchor="ctr"/>
           <a:lstStyle/>
           <a:p>
-            <a:pPr algn="ctr" indent="0" marL="0">
+            <a:pPr marL="0" indent="0" algn="ctr">
               <a:buNone/>
             </a:pPr>
             <a:r>
@@ -3442,7 +3206,7 @@
           <a:bodyPr wrap="square" rtlCol="0" anchor="ctr"/>
           <a:lstStyle/>
           <a:p>
-            <a:pPr indent="0" marL="0">
+            <a:pPr marL="0" indent="0">
               <a:lnSpc>
                 <a:spcPts val="1500"/>
               </a:lnSpc>
@@ -3454,7 +3218,23 @@
                   <a:srgbClr val="1B1F1D"/>
                 </a:solidFill>
               </a:rPr>
-              <a:t>Checkout, Stripe integration, webhook verification</a:t>
+              <a:t>Checkout, </a:t>
+            </a:r>
+            <a:r>
+              <a:rPr lang="en-US" sz="1050" dirty="0" err="1">
+                <a:solidFill>
+                  <a:srgbClr val="1B1F1D"/>
+                </a:solidFill>
+              </a:rPr>
+              <a:t>Paymogo</a:t>
+            </a:r>
+            <a:r>
+              <a:rPr lang="en-US" sz="1050" dirty="0">
+                <a:solidFill>
+                  <a:srgbClr val="1B1F1D"/>
+                </a:solidFill>
+              </a:rPr>
+              <a:t> integration, webhook verification</a:t>
             </a:r>
             <a:endParaRPr lang="en-US" sz="1050" dirty="0"/>
           </a:p>
@@ -3541,7 +3321,7 @@
           <a:bodyPr wrap="square" rtlCol="0" anchor="ctr"/>
           <a:lstStyle/>
           <a:p>
-            <a:pPr indent="0" marL="0">
+            <a:pPr marL="0" indent="0">
               <a:buNone/>
             </a:pPr>
             <a:r>
@@ -3577,7 +3357,7 @@
           <a:bodyPr wrap="square" rtlCol="0" anchor="ctr"/>
           <a:lstStyle/>
           <a:p>
-            <a:pPr indent="0" marL="0">
+            <a:pPr marL="0" indent="0">
               <a:spcAft>
                 <a:spcPts val="1000"/>
               </a:spcAft>
@@ -3594,7 +3374,7 @@
             <a:endParaRPr lang="en-US" sz="1250" dirty="0"/>
           </a:p>
           <a:p>
-            <a:pPr indent="0" marL="0">
+            <a:pPr marL="0" indent="0">
               <a:spcAft>
                 <a:spcPts val="1000"/>
               </a:spcAft>
@@ -3611,7 +3391,7 @@
             <a:endParaRPr lang="en-US" sz="1250" dirty="0"/>
           </a:p>
           <a:p>
-            <a:pPr indent="0" marL="0">
+            <a:pPr marL="0" indent="0">
               <a:spcAft>
                 <a:spcPts val="1000"/>
               </a:spcAft>
@@ -3623,12 +3403,44 @@
                   <a:srgbClr val="1B1F1D"/>
                 </a:solidFill>
               </a:rPr>
-              <a:t>3.  Django creates a Stripe Checkout session; card details are entered on Stripe's hosted page</a:t>
+              <a:t>3.  Django creates a </a:t>
+            </a:r>
+            <a:r>
+              <a:rPr lang="en-US" sz="1250" dirty="0" err="1">
+                <a:solidFill>
+                  <a:srgbClr val="1B1F1D"/>
+                </a:solidFill>
+              </a:rPr>
+              <a:t>Paymongo</a:t>
+            </a:r>
+            <a:r>
+              <a:rPr lang="en-US" sz="1250" dirty="0">
+                <a:solidFill>
+                  <a:srgbClr val="1B1F1D"/>
+                </a:solidFill>
+              </a:rPr>
+              <a:t> Checkout session; card details are entered on </a:t>
+            </a:r>
+            <a:r>
+              <a:rPr lang="en-US" sz="1250" dirty="0" err="1">
+                <a:solidFill>
+                  <a:srgbClr val="1B1F1D"/>
+                </a:solidFill>
+              </a:rPr>
+              <a:t>Paymongo's</a:t>
+            </a:r>
+            <a:r>
+              <a:rPr lang="en-US" sz="1250" dirty="0">
+                <a:solidFill>
+                  <a:srgbClr val="1B1F1D"/>
+                </a:solidFill>
+              </a:rPr>
+              <a:t> hosted page</a:t>
             </a:r>
             <a:endParaRPr lang="en-US" sz="1250" dirty="0"/>
           </a:p>
           <a:p>
-            <a:pPr indent="0" marL="0">
+            <a:pPr marL="0" indent="0">
               <a:spcAft>
                 <a:spcPts val="1000"/>
               </a:spcAft>
@@ -3689,7 +3501,7 @@
           <a:bodyPr wrap="square" rtlCol="0" anchor="ctr"/>
           <a:lstStyle/>
           <a:p>
-            <a:pPr indent="0" marL="0">
+            <a:pPr marL="0" indent="0">
               <a:buNone/>
             </a:pPr>
             <a:r>
@@ -3751,12 +3563,20 @@
               <a:buChar char="•"/>
             </a:pPr>
             <a:r>
+              <a:rPr lang="en-US" sz="1200" dirty="0" err="1">
+                <a:solidFill>
+                  <a:srgbClr val="D9EAE2"/>
+                </a:solidFill>
+              </a:rPr>
+              <a:t>Paymongo</a:t>
+            </a:r>
+            <a:r>
               <a:rPr lang="en-US" sz="1200" dirty="0">
                 <a:solidFill>
                   <a:srgbClr val="D9EAE2"/>
                 </a:solidFill>
               </a:rPr>
-              <a:t>Stripe Checkout — PCI-compliant payments</a:t>
+              <a:t> Checkout — PCI-compliant payments</a:t>
             </a:r>
             <a:endParaRPr lang="en-US" sz="1200" dirty="0"/>
           </a:p>
@@ -3873,7 +3693,7 @@
           <a:bodyPr wrap="square" rtlCol="0" anchor="ctr"/>
           <a:lstStyle/>
           <a:p>
-            <a:pPr algn="r" indent="0" marL="0">
+            <a:pPr marL="0" indent="0" algn="r">
               <a:buNone/>
             </a:pPr>
             <a:r>
@@ -3904,6 +3724,7 @@
         <a:solidFill>
           <a:srgbClr val="FFFFFF"/>
         </a:solidFill>
+        <a:effectLst/>
       </p:bgPr>
     </p:bg>
     <p:spTree>
@@ -3941,11 +3762,11 @@
           <a:bodyPr wrap="square" rtlCol="0" anchor="ctr"/>
           <a:lstStyle/>
           <a:p>
-            <a:pPr indent="0" marL="0">
-              <a:buNone/>
-            </a:pPr>
-            <a:r>
-              <a:rPr lang="en-US" sz="1300" b="1" spc="200" kern="0" dirty="0">
+            <a:pPr marL="0" indent="0">
+              <a:buNone/>
+            </a:pPr>
+            <a:r>
+              <a:rPr lang="en-US" sz="1300" b="1" kern="0" spc="200" dirty="0">
                 <a:solidFill>
                   <a:srgbClr val="1F6F54"/>
                 </a:solidFill>
@@ -3980,7 +3801,7 @@
           <a:bodyPr wrap="square" rtlCol="0" anchor="ctr"/>
           <a:lstStyle/>
           <a:p>
-            <a:pPr indent="0" marL="0">
+            <a:pPr marL="0" indent="0">
               <a:buNone/>
             </a:pPr>
             <a:r>
@@ -4007,23 +3828,41 @@
           <p:nvPr>
             <p:extLst>
               <p:ext uri="{D42A27DB-BD31-4B8C-83A1-F6EECF244321}">
-                <p14:modId xmlns:p14="http://schemas.microsoft.com/office/powerpoint/2010/main" val="1579011935"/>
+                <p14:modId xmlns:p14="http://schemas.microsoft.com/office/powerpoint/2010/main" val="4068448828"/>
               </p:ext>
             </p:extLst>
           </p:nvPr>
         </p:nvGraphicFramePr>
         <p:xfrm>
           <a:off x="548640" y="1234440"/>
-          <a:ext cx="11091672" cy="5120640"/>
+          <a:ext cx="10972800" cy="5120640"/>
         </p:xfrm>
         <a:graphic>
           <a:graphicData uri="http://schemas.openxmlformats.org/drawingml/2006/table">
             <a:tbl>
               <a:tblPr/>
               <a:tblGrid>
-                <a:gridCol w="822960"/>
-                <a:gridCol w="2468880"/>
-                <a:gridCol w="7680960"/>
+                <a:gridCol w="822960">
+                  <a:extLst>
+                    <a:ext uri="{9D8B030D-6E8A-4147-A177-3AD203B41FA5}">
+                      <a16:colId xmlns:a16="http://schemas.microsoft.com/office/drawing/2014/main" val="20000"/>
+                    </a:ext>
+                  </a:extLst>
+                </a:gridCol>
+                <a:gridCol w="2468880">
+                  <a:extLst>
+                    <a:ext uri="{9D8B030D-6E8A-4147-A177-3AD203B41FA5}">
+                      <a16:colId xmlns:a16="http://schemas.microsoft.com/office/drawing/2014/main" val="20001"/>
+                    </a:ext>
+                  </a:extLst>
+                </a:gridCol>
+                <a:gridCol w="7680960">
+                  <a:extLst>
+                    <a:ext uri="{9D8B030D-6E8A-4147-A177-3AD203B41FA5}">
+                      <a16:colId xmlns:a16="http://schemas.microsoft.com/office/drawing/2014/main" val="20002"/>
+                    </a:ext>
+                  </a:extLst>
+                </a:gridCol>
               </a:tblGrid>
               <a:tr h="568960">
                 <a:tc>
@@ -4031,7 +3870,7 @@
                     <a:bodyPr/>
                     <a:lstStyle/>
                     <a:p>
-                      <a:pPr indent="0" marL="0">
+                      <a:pPr marL="0" indent="0">
                         <a:buNone/>
                       </a:pPr>
                       <a:r>
@@ -4092,7 +3931,7 @@
                     <a:bodyPr/>
                     <a:lstStyle/>
                     <a:p>
-                      <a:pPr indent="0" marL="0">
+                      <a:pPr marL="0" indent="0">
                         <a:buNone/>
                       </a:pPr>
                       <a:r>
@@ -4153,7 +3992,7 @@
                     <a:bodyPr/>
                     <a:lstStyle/>
                     <a:p>
-                      <a:pPr indent="0" marL="0">
+                      <a:pPr marL="0" indent="0">
                         <a:buNone/>
                       </a:pPr>
                       <a:r>
@@ -4209,6 +4048,11 @@
                     </a:solidFill>
                   </a:tcPr>
                 </a:tc>
+                <a:extLst>
+                  <a:ext uri="{0D108BD9-81ED-4DB2-BD59-A6C34878D82A}">
+                    <a16:rowId xmlns:a16="http://schemas.microsoft.com/office/drawing/2014/main" val="10000"/>
+                  </a:ext>
+                </a:extLst>
               </a:tr>
               <a:tr h="568960">
                 <a:tc>
@@ -4216,7 +4060,7 @@
                     <a:bodyPr/>
                     <a:lstStyle/>
                     <a:p>
-                      <a:pPr indent="0" marL="0">
+                      <a:pPr marL="0" indent="0">
                         <a:buNone/>
                       </a:pPr>
                       <a:r>
@@ -4277,7 +4121,7 @@
                     <a:bodyPr/>
                     <a:lstStyle/>
                     <a:p>
-                      <a:pPr indent="0" marL="0">
+                      <a:pPr marL="0" indent="0">
                         <a:buNone/>
                       </a:pPr>
                       <a:r>
@@ -4338,7 +4182,7 @@
                     <a:bodyPr/>
                     <a:lstStyle/>
                     <a:p>
-                      <a:pPr indent="0" marL="0">
+                      <a:pPr marL="0" indent="0">
                         <a:buNone/>
                       </a:pPr>
                       <a:r>
@@ -4394,6 +4238,11 @@
                     </a:solidFill>
                   </a:tcPr>
                 </a:tc>
+                <a:extLst>
+                  <a:ext uri="{0D108BD9-81ED-4DB2-BD59-A6C34878D82A}">
+                    <a16:rowId xmlns:a16="http://schemas.microsoft.com/office/drawing/2014/main" val="10001"/>
+                  </a:ext>
+                </a:extLst>
               </a:tr>
               <a:tr h="568960">
                 <a:tc>
@@ -4401,7 +4250,7 @@
                     <a:bodyPr/>
                     <a:lstStyle/>
                     <a:p>
-                      <a:pPr indent="0" marL="0">
+                      <a:pPr marL="0" indent="0">
                         <a:buNone/>
                       </a:pPr>
                       <a:r>
@@ -4462,7 +4311,7 @@
                     <a:bodyPr/>
                     <a:lstStyle/>
                     <a:p>
-                      <a:pPr indent="0" marL="0">
+                      <a:pPr marL="0" indent="0">
                         <a:buNone/>
                       </a:pPr>
                       <a:r>
@@ -4523,7 +4372,7 @@
                     <a:bodyPr/>
                     <a:lstStyle/>
                     <a:p>
-                      <a:pPr indent="0" marL="0">
+                      <a:pPr marL="0" indent="0">
                         <a:buNone/>
                       </a:pPr>
                       <a:r>
@@ -4532,7 +4381,7 @@
                             <a:srgbClr val="1B1F1D"/>
                           </a:solidFill>
                         </a:rPr>
-                        <a:t>Secrets via .env; PBKDF2 password hashing; card data never touches the server</a:t>
+                        <a:t>Secrets via .env; PBKDF2 password hashing; e-wallet data never touches the server</a:t>
                       </a:r>
                       <a:endParaRPr lang="en-US" sz="1150" dirty="0"/>
                     </a:p>
@@ -4579,6 +4428,11 @@
                     </a:solidFill>
                   </a:tcPr>
                 </a:tc>
+                <a:extLst>
+                  <a:ext uri="{0D108BD9-81ED-4DB2-BD59-A6C34878D82A}">
+                    <a16:rowId xmlns:a16="http://schemas.microsoft.com/office/drawing/2014/main" val="10002"/>
+                  </a:ext>
+                </a:extLst>
               </a:tr>
               <a:tr h="568960">
                 <a:tc>
@@ -4586,7 +4440,7 @@
                     <a:bodyPr/>
                     <a:lstStyle/>
                     <a:p>
-                      <a:pPr indent="0" marL="0">
+                      <a:pPr marL="0" indent="0">
                         <a:buNone/>
                       </a:pPr>
                       <a:r>
@@ -4647,7 +4501,7 @@
                     <a:bodyPr/>
                     <a:lstStyle/>
                     <a:p>
-                      <a:pPr indent="0" marL="0">
+                      <a:pPr marL="0" indent="0">
                         <a:buNone/>
                       </a:pPr>
                       <a:r>
@@ -4708,7 +4562,7 @@
                     <a:bodyPr/>
                     <a:lstStyle/>
                     <a:p>
-                      <a:pPr indent="0" marL="0">
+                      <a:pPr marL="0" indent="0">
                         <a:buNone/>
                       </a:pPr>
                       <a:r>
@@ -4764,6 +4618,11 @@
                     </a:solidFill>
                   </a:tcPr>
                 </a:tc>
+                <a:extLst>
+                  <a:ext uri="{0D108BD9-81ED-4DB2-BD59-A6C34878D82A}">
+                    <a16:rowId xmlns:a16="http://schemas.microsoft.com/office/drawing/2014/main" val="10003"/>
+                  </a:ext>
+                </a:extLst>
               </a:tr>
               <a:tr h="568960">
                 <a:tc>
@@ -4771,7 +4630,7 @@
                     <a:bodyPr/>
                     <a:lstStyle/>
                     <a:p>
-                      <a:pPr indent="0" marL="0">
+                      <a:pPr marL="0" indent="0">
                         <a:buNone/>
                       </a:pPr>
                       <a:r>
@@ -4832,7 +4691,7 @@
                     <a:bodyPr/>
                     <a:lstStyle/>
                     <a:p>
-                      <a:pPr indent="0" marL="0">
+                      <a:pPr marL="0" indent="0">
                         <a:buNone/>
                       </a:pPr>
                       <a:r>
@@ -4893,7 +4752,7 @@
                     <a:bodyPr/>
                     <a:lstStyle/>
                     <a:p>
-                      <a:pPr indent="0" marL="0">
+                      <a:pPr marL="0" indent="0">
                         <a:buNone/>
                       </a:pPr>
                       <a:r>
@@ -4949,6 +4808,11 @@
                     </a:solidFill>
                   </a:tcPr>
                 </a:tc>
+                <a:extLst>
+                  <a:ext uri="{0D108BD9-81ED-4DB2-BD59-A6C34878D82A}">
+                    <a16:rowId xmlns:a16="http://schemas.microsoft.com/office/drawing/2014/main" val="10004"/>
+                  </a:ext>
+                </a:extLst>
               </a:tr>
               <a:tr h="568960">
                 <a:tc>
@@ -4956,7 +4820,7 @@
                     <a:bodyPr/>
                     <a:lstStyle/>
                     <a:p>
-                      <a:pPr indent="0" marL="0">
+                      <a:pPr marL="0" indent="0">
                         <a:buNone/>
                       </a:pPr>
                       <a:r>
@@ -5017,7 +4881,7 @@
                     <a:bodyPr/>
                     <a:lstStyle/>
                     <a:p>
-                      <a:pPr indent="0" marL="0">
+                      <a:pPr marL="0" indent="0">
                         <a:buNone/>
                       </a:pPr>
                       <a:r>
@@ -5078,7 +4942,7 @@
                     <a:bodyPr/>
                     <a:lstStyle/>
                     <a:p>
-                      <a:pPr indent="0" marL="0">
+                      <a:pPr marL="0" indent="0">
                         <a:buNone/>
                       </a:pPr>
                       <a:r>
@@ -5134,6 +4998,11 @@
                     </a:solidFill>
                   </a:tcPr>
                 </a:tc>
+                <a:extLst>
+                  <a:ext uri="{0D108BD9-81ED-4DB2-BD59-A6C34878D82A}">
+                    <a16:rowId xmlns:a16="http://schemas.microsoft.com/office/drawing/2014/main" val="10005"/>
+                  </a:ext>
+                </a:extLst>
               </a:tr>
               <a:tr h="568960">
                 <a:tc>
@@ -5141,7 +5010,7 @@
                     <a:bodyPr/>
                     <a:lstStyle/>
                     <a:p>
-                      <a:pPr indent="0" marL="0">
+                      <a:pPr marL="0" indent="0">
                         <a:buNone/>
                       </a:pPr>
                       <a:r>
@@ -5202,7 +5071,7 @@
                     <a:bodyPr/>
                     <a:lstStyle/>
                     <a:p>
-                      <a:pPr indent="0" marL="0">
+                      <a:pPr marL="0" indent="0">
                         <a:buNone/>
                       </a:pPr>
                       <a:r>
@@ -5263,7 +5132,7 @@
                     <a:bodyPr/>
                     <a:lstStyle/>
                     <a:p>
-                      <a:pPr indent="0" marL="0">
+                      <a:pPr marL="0" indent="0">
                         <a:buNone/>
                       </a:pPr>
                       <a:r>
@@ -5319,6 +5188,11 @@
                     </a:solidFill>
                   </a:tcPr>
                 </a:tc>
+                <a:extLst>
+                  <a:ext uri="{0D108BD9-81ED-4DB2-BD59-A6C34878D82A}">
+                    <a16:rowId xmlns:a16="http://schemas.microsoft.com/office/drawing/2014/main" val="10006"/>
+                  </a:ext>
+                </a:extLst>
               </a:tr>
               <a:tr h="568960">
                 <a:tc>
@@ -5326,7 +5200,7 @@
                     <a:bodyPr/>
                     <a:lstStyle/>
                     <a:p>
-                      <a:pPr indent="0" marL="0">
+                      <a:pPr marL="0" indent="0">
                         <a:buNone/>
                       </a:pPr>
                       <a:r>
@@ -5387,7 +5261,7 @@
                     <a:bodyPr/>
                     <a:lstStyle/>
                     <a:p>
-                      <a:pPr indent="0" marL="0">
+                      <a:pPr marL="0" indent="0">
                         <a:buNone/>
                       </a:pPr>
                       <a:r>
@@ -5448,7 +5322,7 @@
                     <a:bodyPr/>
                     <a:lstStyle/>
                     <a:p>
-                      <a:pPr indent="0" marL="0">
+                      <a:pPr marL="0" indent="0">
                         <a:buNone/>
                       </a:pPr>
                       <a:r>
@@ -5504,6 +5378,11 @@
                     </a:solidFill>
                   </a:tcPr>
                 </a:tc>
+                <a:extLst>
+                  <a:ext uri="{0D108BD9-81ED-4DB2-BD59-A6C34878D82A}">
+                    <a16:rowId xmlns:a16="http://schemas.microsoft.com/office/drawing/2014/main" val="10007"/>
+                  </a:ext>
+                </a:extLst>
               </a:tr>
               <a:tr h="568960">
                 <a:tc>
@@ -5511,7 +5390,7 @@
                     <a:bodyPr/>
                     <a:lstStyle/>
                     <a:p>
-                      <a:pPr indent="0" marL="0">
+                      <a:pPr marL="0" indent="0">
                         <a:buNone/>
                       </a:pPr>
                       <a:r>
@@ -5572,7 +5451,7 @@
                     <a:bodyPr/>
                     <a:lstStyle/>
                     <a:p>
-                      <a:pPr indent="0" marL="0">
+                      <a:pPr marL="0" indent="0">
                         <a:buNone/>
                       </a:pPr>
                       <a:r>
@@ -5633,7 +5512,7 @@
                     <a:bodyPr/>
                     <a:lstStyle/>
                     <a:p>
-                      <a:pPr indent="0" marL="0">
+                      <a:pPr marL="0" indent="0">
                         <a:buNone/>
                       </a:pPr>
                       <a:r>
@@ -5689,6 +5568,11 @@
                     </a:solidFill>
                   </a:tcPr>
                 </a:tc>
+                <a:extLst>
+                  <a:ext uri="{0D108BD9-81ED-4DB2-BD59-A6C34878D82A}">
+                    <a16:rowId xmlns:a16="http://schemas.microsoft.com/office/drawing/2014/main" val="10008"/>
+                  </a:ext>
+                </a:extLst>
               </a:tr>
             </a:tbl>
           </a:graphicData>
@@ -5696,7 +5580,7 @@
       </p:graphicFrame>
       <p:sp>
         <p:nvSpPr>
-          <p:cNvPr id="5" name="Text 2"/>
+          <p:cNvPr id="4" name="Text 2"/>
           <p:cNvSpPr/>
           <p:nvPr/>
         </p:nvSpPr>
@@ -5715,7 +5599,7 @@
           <a:bodyPr wrap="square" rtlCol="0" anchor="ctr"/>
           <a:lstStyle/>
           <a:p>
-            <a:pPr algn="r" indent="0" marL="0">
+            <a:pPr marL="0" indent="0" algn="r">
               <a:buNone/>
             </a:pPr>
             <a:r>
@@ -5746,6 +5630,7 @@
         <a:solidFill>
           <a:srgbClr val="FFFFFF"/>
         </a:solidFill>
+        <a:effectLst/>
       </p:bgPr>
     </p:bg>
     <p:spTree>
@@ -5783,11 +5668,11 @@
           <a:bodyPr wrap="square" rtlCol="0" anchor="ctr"/>
           <a:lstStyle/>
           <a:p>
-            <a:pPr indent="0" marL="0">
-              <a:buNone/>
-            </a:pPr>
-            <a:r>
-              <a:rPr lang="en-US" sz="1300" b="1" spc="200" kern="0" dirty="0">
+            <a:pPr marL="0" indent="0">
+              <a:buNone/>
+            </a:pPr>
+            <a:r>
+              <a:rPr lang="en-US" sz="1300" b="1" kern="0" spc="200" dirty="0">
                 <a:solidFill>
                   <a:srgbClr val="C77F1E"/>
                 </a:solidFill>
@@ -5822,7 +5707,7 @@
           <a:bodyPr wrap="square" rtlCol="0" anchor="ctr"/>
           <a:lstStyle/>
           <a:p>
-            <a:pPr indent="0" marL="0">
+            <a:pPr marL="0" indent="0">
               <a:buNone/>
             </a:pPr>
             <a:r>
@@ -5883,7 +5768,7 @@
           <a:bodyPr wrap="square" rtlCol="0" anchor="ctr"/>
           <a:lstStyle/>
           <a:p>
-            <a:pPr indent="0" marL="0">
+            <a:pPr marL="0" indent="0">
               <a:buNone/>
             </a:pPr>
             <a:r>
@@ -5919,7 +5804,7 @@
           <a:bodyPr wrap="square" rtlCol="0" anchor="ctr"/>
           <a:lstStyle/>
           <a:p>
-            <a:pPr indent="0" marL="0">
+            <a:pPr marL="0" indent="0">
               <a:lnSpc>
                 <a:spcPts val="1800"/>
               </a:lnSpc>
@@ -5980,7 +5865,7 @@
           <a:bodyPr wrap="square" rtlCol="0" anchor="ctr"/>
           <a:lstStyle/>
           <a:p>
-            <a:pPr indent="0" marL="0">
+            <a:pPr marL="0" indent="0">
               <a:spcAft>
                 <a:spcPts val="200"/>
               </a:spcAft>
@@ -6000,7 +5885,7 @@
             <a:endParaRPr lang="en-US" sz="1050" dirty="0"/>
           </a:p>
           <a:p>
-            <a:pPr indent="0" marL="0">
+            <a:pPr marL="0" indent="0">
               <a:spcAft>
                 <a:spcPts val="200"/>
               </a:spcAft>
@@ -6020,7 +5905,7 @@
             <a:endParaRPr lang="en-US" sz="1050" dirty="0"/>
           </a:p>
           <a:p>
-            <a:pPr indent="0" marL="0">
+            <a:pPr marL="0" indent="0">
               <a:spcAft>
                 <a:spcPts val="200"/>
               </a:spcAft>
@@ -6040,7 +5925,7 @@
             <a:endParaRPr lang="en-US" sz="1050" dirty="0"/>
           </a:p>
           <a:p>
-            <a:pPr indent="0" marL="0">
+            <a:pPr marL="0" indent="0">
               <a:spcAft>
                 <a:spcPts val="200"/>
               </a:spcAft>
@@ -6049,7 +5934,7 @@
             <a:endParaRPr lang="en-US" sz="1050" dirty="0"/>
           </a:p>
           <a:p>
-            <a:pPr indent="0" marL="0">
+            <a:pPr marL="0" indent="0">
               <a:spcAft>
                 <a:spcPts val="200"/>
               </a:spcAft>
@@ -6069,7 +5954,7 @@
             <a:endParaRPr lang="en-US" sz="1050" dirty="0"/>
           </a:p>
           <a:p>
-            <a:pPr indent="0" marL="0">
+            <a:pPr marL="0" indent="0">
               <a:spcAft>
                 <a:spcPts val="200"/>
               </a:spcAft>
@@ -6089,7 +5974,7 @@
             <a:endParaRPr lang="en-US" sz="1050" dirty="0"/>
           </a:p>
           <a:p>
-            <a:pPr indent="0" marL="0">
+            <a:pPr marL="0" indent="0">
               <a:spcAft>
                 <a:spcPts val="200"/>
               </a:spcAft>
@@ -6109,7 +5994,7 @@
             <a:endParaRPr lang="en-US" sz="1050" dirty="0"/>
           </a:p>
           <a:p>
-            <a:pPr indent="0" marL="0">
+            <a:pPr marL="0" indent="0">
               <a:spcAft>
                 <a:spcPts val="200"/>
               </a:spcAft>
@@ -6129,7 +6014,7 @@
             <a:endParaRPr lang="en-US" sz="1050" dirty="0"/>
           </a:p>
           <a:p>
-            <a:pPr indent="0" marL="0">
+            <a:pPr marL="0" indent="0">
               <a:spcAft>
                 <a:spcPts val="200"/>
               </a:spcAft>
@@ -6193,7 +6078,7 @@
           <a:bodyPr wrap="square" rtlCol="0" anchor="ctr"/>
           <a:lstStyle/>
           <a:p>
-            <a:pPr indent="0" marL="0">
+            <a:pPr marL="0" indent="0">
               <a:buNone/>
             </a:pPr>
             <a:r>
@@ -6229,7 +6114,7 @@
           <a:bodyPr wrap="square" rtlCol="0" anchor="ctr"/>
           <a:lstStyle/>
           <a:p>
-            <a:pPr indent="0" marL="0">
+            <a:pPr marL="0" indent="0">
               <a:lnSpc>
                 <a:spcPts val="1800"/>
               </a:lnSpc>
@@ -6290,7 +6175,7 @@
           <a:bodyPr wrap="square" rtlCol="0" anchor="ctr"/>
           <a:lstStyle/>
           <a:p>
-            <a:pPr indent="0" marL="0">
+            <a:pPr marL="0" indent="0">
               <a:spcAft>
                 <a:spcPts val="200"/>
               </a:spcAft>
@@ -6310,7 +6195,7 @@
             <a:endParaRPr lang="en-US" sz="1050" dirty="0"/>
           </a:p>
           <a:p>
-            <a:pPr indent="0" marL="0">
+            <a:pPr marL="0" indent="0">
               <a:spcAft>
                 <a:spcPts val="200"/>
               </a:spcAft>
@@ -6325,12 +6210,34 @@
                 <a:ea typeface="Consolas" pitchFamily="34" charset="-122"/>
                 <a:cs typeface="Consolas" pitchFamily="34" charset="-120"/>
               </a:rPr>
-              <a:t>event = stripe.Webhook.construct_event(</a:t>
+              <a:t>event = </a:t>
+            </a:r>
+            <a:r>
+              <a:rPr lang="en-US" sz="1150" dirty="0" err="1">
+                <a:solidFill>
+                  <a:srgbClr val="D9EAE2"/>
+                </a:solidFill>
+                <a:latin typeface="Consolas" pitchFamily="34" charset="0"/>
+                <a:ea typeface="Consolas" pitchFamily="34" charset="-122"/>
+                <a:cs typeface="Consolas" pitchFamily="34" charset="-120"/>
+              </a:rPr>
+              <a:t>paymongo.Webhook.construct_event</a:t>
+            </a:r>
+            <a:r>
+              <a:rPr lang="en-US" sz="1150" dirty="0">
+                <a:solidFill>
+                  <a:srgbClr val="D9EAE2"/>
+                </a:solidFill>
+                <a:latin typeface="Consolas" pitchFamily="34" charset="0"/>
+                <a:ea typeface="Consolas" pitchFamily="34" charset="-122"/>
+                <a:cs typeface="Consolas" pitchFamily="34" charset="-120"/>
+              </a:rPr>
+              <a:t>(</a:t>
             </a:r>
             <a:endParaRPr lang="en-US" sz="1050" dirty="0"/>
           </a:p>
           <a:p>
-            <a:pPr indent="0" marL="0">
+            <a:pPr marL="0" indent="0">
               <a:spcAft>
                 <a:spcPts val="200"/>
               </a:spcAft>
@@ -6350,7 +6257,7 @@
             <a:endParaRPr lang="en-US" sz="1050" dirty="0"/>
           </a:p>
           <a:p>
-            <a:pPr indent="0" marL="0">
+            <a:pPr marL="0" indent="0">
               <a:spcAft>
                 <a:spcPts val="200"/>
               </a:spcAft>
@@ -6370,7 +6277,7 @@
             <a:endParaRPr lang="en-US" sz="1050" dirty="0"/>
           </a:p>
           <a:p>
-            <a:pPr indent="0" marL="0">
+            <a:pPr marL="0" indent="0">
               <a:spcAft>
                 <a:spcPts val="200"/>
               </a:spcAft>
@@ -6390,7 +6297,7 @@
             <a:endParaRPr lang="en-US" sz="1050" dirty="0"/>
           </a:p>
           <a:p>
-            <a:pPr indent="0" marL="0">
+            <a:pPr marL="0" indent="0">
               <a:spcAft>
                 <a:spcPts val="200"/>
               </a:spcAft>
@@ -6410,7 +6317,7 @@
             <a:endParaRPr lang="en-US" sz="1050" dirty="0"/>
           </a:p>
           <a:p>
-            <a:pPr indent="0" marL="0">
+            <a:pPr marL="0" indent="0">
               <a:spcAft>
                 <a:spcPts val="200"/>
               </a:spcAft>
@@ -6430,7 +6337,7 @@
             <a:endParaRPr lang="en-US" sz="1050" dirty="0"/>
           </a:p>
           <a:p>
-            <a:pPr indent="0" marL="0">
+            <a:pPr marL="0" indent="0">
               <a:spcAft>
                 <a:spcPts val="200"/>
               </a:spcAft>
@@ -6472,7 +6379,7 @@
           <a:bodyPr wrap="square" rtlCol="0" anchor="ctr"/>
           <a:lstStyle/>
           <a:p>
-            <a:pPr algn="r" indent="0" marL="0">
+            <a:pPr marL="0" indent="0" algn="r">
               <a:buNone/>
             </a:pPr>
             <a:r>
@@ -6503,6 +6410,7 @@
         <a:solidFill>
           <a:srgbClr val="FFFFFF"/>
         </a:solidFill>
+        <a:effectLst/>
       </p:bgPr>
     </p:bg>
     <p:spTree>
@@ -6540,11 +6448,11 @@
           <a:bodyPr wrap="square" rtlCol="0" anchor="ctr"/>
           <a:lstStyle/>
           <a:p>
-            <a:pPr indent="0" marL="0">
-              <a:buNone/>
-            </a:pPr>
-            <a:r>
-              <a:rPr lang="en-US" sz="1300" b="1" spc="200" kern="0" dirty="0">
+            <a:pPr marL="0" indent="0">
+              <a:buNone/>
+            </a:pPr>
+            <a:r>
+              <a:rPr lang="en-US" sz="1300" b="1" kern="0" spc="200" dirty="0">
                 <a:solidFill>
                   <a:srgbClr val="1F6F54"/>
                 </a:solidFill>
@@ -6579,7 +6487,7 @@
           <a:bodyPr wrap="square" rtlCol="0" anchor="ctr"/>
           <a:lstStyle/>
           <a:p>
-            <a:pPr indent="0" marL="0">
+            <a:pPr marL="0" indent="0">
               <a:buNone/>
             </a:pPr>
             <a:r>
@@ -6599,7 +6507,7 @@
       </p:sp>
       <p:graphicFrame>
         <p:nvGraphicFramePr>
-          <p:cNvPr id="4" name="Chart 0" descr=""/>
+          <p:cNvPr id="4" name="Chart 0"/>
           <p:cNvGraphicFramePr/>
           <p:nvPr/>
         </p:nvGraphicFramePr>
@@ -6607,9 +6515,9 @@
           <a:off x="548640" y="1280160"/>
           <a:ext cx="5760720" cy="3931920"/>
         </p:xfrm>
-        <a:graphic xmlns:a="http://schemas.openxmlformats.org/drawingml/2006/main">
+        <a:graphic>
           <a:graphicData uri="http://schemas.openxmlformats.org/drawingml/2006/chart">
-            <c:chart xmlns:c="http://schemas.openxmlformats.org/drawingml/2006/chart" r:id="rId1"/>
+            <c:chart xmlns:c="http://schemas.openxmlformats.org/drawingml/2006/chart" xmlns:r="http://schemas.openxmlformats.org/officeDocument/2006/relationships" r:id="rId3"/>
           </a:graphicData>
         </a:graphic>
       </p:graphicFrame>
@@ -6634,7 +6542,7 @@
           <a:bodyPr wrap="square" rtlCol="0" anchor="ctr"/>
           <a:lstStyle/>
           <a:p>
-            <a:pPr indent="0" marL="0">
+            <a:pPr marL="0" indent="0">
               <a:buNone/>
             </a:pPr>
             <a:r>
@@ -6670,7 +6578,7 @@
           <a:bodyPr wrap="square" rtlCol="0" anchor="ctr"/>
           <a:lstStyle/>
           <a:p>
-            <a:pPr indent="0" marL="0">
+            <a:pPr marL="0" indent="0">
               <a:buNone/>
             </a:pPr>
             <a:r>
@@ -6706,7 +6614,7 @@
           <a:bodyPr wrap="square" rtlCol="0" anchor="ctr"/>
           <a:lstStyle/>
           <a:p>
-            <a:pPr indent="0" marL="0">
+            <a:pPr marL="0" indent="0">
               <a:lnSpc>
                 <a:spcPts val="1500"/>
               </a:lnSpc>
@@ -6745,7 +6653,7 @@
           <a:bodyPr wrap="square" rtlCol="0" anchor="ctr"/>
           <a:lstStyle/>
           <a:p>
-            <a:pPr indent="0" marL="0">
+            <a:pPr marL="0" indent="0">
               <a:buNone/>
             </a:pPr>
             <a:r>
@@ -6781,7 +6689,7 @@
           <a:bodyPr wrap="square" rtlCol="0" anchor="ctr"/>
           <a:lstStyle/>
           <a:p>
-            <a:pPr indent="0" marL="0">
+            <a:pPr marL="0" indent="0">
               <a:lnSpc>
                 <a:spcPts val="1500"/>
               </a:lnSpc>
@@ -6820,7 +6728,7 @@
           <a:bodyPr wrap="square" rtlCol="0" anchor="ctr"/>
           <a:lstStyle/>
           <a:p>
-            <a:pPr indent="0" marL="0">
+            <a:pPr marL="0" indent="0">
               <a:buNone/>
             </a:pPr>
             <a:r>
@@ -6856,7 +6764,7 @@
           <a:bodyPr wrap="square" rtlCol="0" anchor="ctr"/>
           <a:lstStyle/>
           <a:p>
-            <a:pPr indent="0" marL="0">
+            <a:pPr marL="0" indent="0">
               <a:lnSpc>
                 <a:spcPts val="1500"/>
               </a:lnSpc>
@@ -6895,7 +6803,7 @@
           <a:bodyPr wrap="square" rtlCol="0" anchor="ctr"/>
           <a:lstStyle/>
           <a:p>
-            <a:pPr indent="0" marL="0">
+            <a:pPr marL="0" indent="0">
               <a:buNone/>
             </a:pPr>
             <a:r>
@@ -6931,7 +6839,7 @@
           <a:bodyPr wrap="square" rtlCol="0" anchor="ctr"/>
           <a:lstStyle/>
           <a:p>
-            <a:pPr indent="0" marL="0">
+            <a:pPr marL="0" indent="0">
               <a:lnSpc>
                 <a:spcPts val="1500"/>
               </a:lnSpc>
@@ -6943,7 +6851,23 @@
                   <a:srgbClr val="1B1F1D"/>
                 </a:solidFill>
               </a:rPr>
-              <a:t>Order ownership · server-side re-pricing · stock checks · Stripe webhook signature verification</a:t>
+              <a:t>Order ownership · server-side re-pricing · stock checks · </a:t>
+            </a:r>
+            <a:r>
+              <a:rPr lang="en-US" sz="1100" dirty="0" err="1">
+                <a:solidFill>
+                  <a:srgbClr val="1B1F1D"/>
+                </a:solidFill>
+              </a:rPr>
+              <a:t>Paymongo</a:t>
+            </a:r>
+            <a:r>
+              <a:rPr lang="en-US" sz="1100" dirty="0">
+                <a:solidFill>
+                  <a:srgbClr val="1B1F1D"/>
+                </a:solidFill>
+              </a:rPr>
+              <a:t> webhook signature verification</a:t>
             </a:r>
             <a:endParaRPr lang="en-US" sz="1100" dirty="0"/>
           </a:p>
@@ -6992,7 +6916,7 @@
           <a:bodyPr wrap="square" rtlCol="0" anchor="ctr"/>
           <a:lstStyle/>
           <a:p>
-            <a:pPr indent="0" marL="0">
+            <a:pPr marL="0" indent="0">
               <a:buNone/>
             </a:pPr>
             <a:r>
@@ -7031,7 +6955,7 @@
           <a:bodyPr wrap="square" rtlCol="0" anchor="ctr"/>
           <a:lstStyle/>
           <a:p>
-            <a:pPr algn="r" indent="0" marL="0">
+            <a:pPr marL="0" indent="0" algn="r">
               <a:buNone/>
             </a:pPr>
             <a:r>
@@ -7062,6 +6986,7 @@
         <a:solidFill>
           <a:srgbClr val="FFFFFF"/>
         </a:solidFill>
+        <a:effectLst/>
       </p:bgPr>
     </p:bg>
     <p:spTree>
@@ -7099,11 +7024,11 @@
           <a:bodyPr wrap="square" rtlCol="0" anchor="ctr"/>
           <a:lstStyle/>
           <a:p>
-            <a:pPr indent="0" marL="0">
-              <a:buNone/>
-            </a:pPr>
-            <a:r>
-              <a:rPr lang="en-US" sz="1300" b="1" spc="200" kern="0" dirty="0">
+            <a:pPr marL="0" indent="0">
+              <a:buNone/>
+            </a:pPr>
+            <a:r>
+              <a:rPr lang="en-US" sz="1300" b="1" kern="0" spc="200" dirty="0">
                 <a:solidFill>
                   <a:srgbClr val="1F6F54"/>
                 </a:solidFill>
@@ -7138,7 +7063,7 @@
           <a:bodyPr wrap="square" rtlCol="0" anchor="ctr"/>
           <a:lstStyle/>
           <a:p>
-            <a:pPr indent="0" marL="0">
+            <a:pPr marL="0" indent="0">
               <a:buNone/>
             </a:pPr>
             <a:r>
@@ -7177,7 +7102,7 @@
           <a:bodyPr wrap="square" rtlCol="0" anchor="ctr"/>
           <a:lstStyle/>
           <a:p>
-            <a:pPr indent="0" marL="0">
+            <a:pPr marL="0" indent="0">
               <a:lnSpc>
                 <a:spcPts val="1700"/>
               </a:lnSpc>
@@ -7197,7 +7122,7 @@
       </p:sp>
       <p:graphicFrame>
         <p:nvGraphicFramePr>
-          <p:cNvPr id="5" name="Chart 0" descr=""/>
+          <p:cNvPr id="5" name="Chart 0"/>
           <p:cNvGraphicFramePr/>
           <p:nvPr/>
         </p:nvGraphicFramePr>
@@ -7205,9 +7130,9 @@
           <a:off x="548640" y="2057400"/>
           <a:ext cx="3383280" cy="3383280"/>
         </p:xfrm>
-        <a:graphic xmlns:a="http://schemas.openxmlformats.org/drawingml/2006/main">
+        <a:graphic>
           <a:graphicData uri="http://schemas.openxmlformats.org/drawingml/2006/chart">
-            <c:chart xmlns:c="http://schemas.openxmlformats.org/drawingml/2006/chart" r:id="rId1"/>
+            <c:chart xmlns:c="http://schemas.openxmlformats.org/drawingml/2006/chart" xmlns:r="http://schemas.openxmlformats.org/officeDocument/2006/relationships" r:id="rId3"/>
           </a:graphicData>
         </a:graphic>
       </p:graphicFrame>
@@ -7232,7 +7157,7 @@
           <a:bodyPr wrap="square" rtlCol="0" anchor="ctr"/>
           <a:lstStyle/>
           <a:p>
-            <a:pPr algn="ctr" indent="0" marL="0">
+            <a:pPr marL="0" indent="0" algn="ctr">
               <a:buNone/>
             </a:pPr>
             <a:r>
@@ -7290,7 +7215,7 @@
           <a:bodyPr wrap="square" rtlCol="0" anchor="ctr"/>
           <a:lstStyle/>
           <a:p>
-            <a:pPr indent="0" marL="0">
+            <a:pPr marL="0" indent="0">
               <a:buNone/>
             </a:pPr>
             <a:r>
@@ -7326,7 +7251,7 @@
           <a:bodyPr wrap="square" rtlCol="0" anchor="ctr"/>
           <a:lstStyle/>
           <a:p>
-            <a:pPr indent="0" marL="0">
+            <a:pPr marL="0" indent="0">
               <a:buNone/>
             </a:pPr>
             <a:r>
@@ -7362,7 +7287,7 @@
           <a:bodyPr wrap="square" rtlCol="0" anchor="ctr"/>
           <a:lstStyle/>
           <a:p>
-            <a:pPr algn="ctr" indent="0" marL="0">
+            <a:pPr marL="0" indent="0" algn="ctr">
               <a:buNone/>
             </a:pPr>
             <a:r>
@@ -7420,7 +7345,7 @@
           <a:bodyPr wrap="square" rtlCol="0" anchor="ctr"/>
           <a:lstStyle/>
           <a:p>
-            <a:pPr indent="0" marL="0">
+            <a:pPr marL="0" indent="0">
               <a:buNone/>
             </a:pPr>
             <a:r>
@@ -7456,7 +7381,7 @@
           <a:bodyPr wrap="square" rtlCol="0" anchor="ctr"/>
           <a:lstStyle/>
           <a:p>
-            <a:pPr indent="0" marL="0">
+            <a:pPr marL="0" indent="0">
               <a:buNone/>
             </a:pPr>
             <a:r>
@@ -7492,7 +7417,7 @@
           <a:bodyPr wrap="square" rtlCol="0" anchor="ctr"/>
           <a:lstStyle/>
           <a:p>
-            <a:pPr algn="ctr" indent="0" marL="0">
+            <a:pPr marL="0" indent="0" algn="ctr">
               <a:buNone/>
             </a:pPr>
             <a:r>
@@ -7550,7 +7475,7 @@
           <a:bodyPr wrap="square" rtlCol="0" anchor="ctr"/>
           <a:lstStyle/>
           <a:p>
-            <a:pPr indent="0" marL="0">
+            <a:pPr marL="0" indent="0">
               <a:buNone/>
             </a:pPr>
             <a:r>
@@ -7586,7 +7511,7 @@
           <a:bodyPr wrap="square" rtlCol="0" anchor="ctr"/>
           <a:lstStyle/>
           <a:p>
-            <a:pPr indent="0" marL="0">
+            <a:pPr marL="0" indent="0">
               <a:buNone/>
             </a:pPr>
             <a:r>
@@ -7622,7 +7547,7 @@
           <a:bodyPr wrap="square" rtlCol="0" anchor="ctr"/>
           <a:lstStyle/>
           <a:p>
-            <a:pPr algn="ctr" indent="0" marL="0">
+            <a:pPr marL="0" indent="0" algn="ctr">
               <a:buNone/>
             </a:pPr>
             <a:r>
@@ -7680,7 +7605,7 @@
           <a:bodyPr wrap="square" rtlCol="0" anchor="ctr"/>
           <a:lstStyle/>
           <a:p>
-            <a:pPr indent="0" marL="0">
+            <a:pPr marL="0" indent="0">
               <a:buNone/>
             </a:pPr>
             <a:r>
@@ -7716,7 +7641,7 @@
           <a:bodyPr wrap="square" rtlCol="0" anchor="ctr"/>
           <a:lstStyle/>
           <a:p>
-            <a:pPr indent="0" marL="0">
+            <a:pPr marL="0" indent="0">
               <a:buNone/>
             </a:pPr>
             <a:r>
@@ -7752,7 +7677,7 @@
           <a:bodyPr wrap="square" rtlCol="0" anchor="ctr"/>
           <a:lstStyle/>
           <a:p>
-            <a:pPr algn="ctr" indent="0" marL="0">
+            <a:pPr marL="0" indent="0" algn="ctr">
               <a:buNone/>
             </a:pPr>
             <a:r>
@@ -7810,7 +7735,7 @@
           <a:bodyPr wrap="square" rtlCol="0" anchor="ctr"/>
           <a:lstStyle/>
           <a:p>
-            <a:pPr indent="0" marL="0">
+            <a:pPr marL="0" indent="0">
               <a:buNone/>
             </a:pPr>
             <a:r>
@@ -7846,7 +7771,7 @@
           <a:bodyPr wrap="square" rtlCol="0" anchor="ctr"/>
           <a:lstStyle/>
           <a:p>
-            <a:pPr indent="0" marL="0">
+            <a:pPr marL="0" indent="0">
               <a:buNone/>
             </a:pPr>
             <a:r>
@@ -7882,7 +7807,7 @@
           <a:bodyPr wrap="square" rtlCol="0" anchor="ctr"/>
           <a:lstStyle/>
           <a:p>
-            <a:pPr algn="ctr" indent="0" marL="0">
+            <a:pPr marL="0" indent="0" algn="ctr">
               <a:buNone/>
             </a:pPr>
             <a:r>
@@ -7940,7 +7865,7 @@
           <a:bodyPr wrap="square" rtlCol="0" anchor="ctr"/>
           <a:lstStyle/>
           <a:p>
-            <a:pPr indent="0" marL="0">
+            <a:pPr marL="0" indent="0">
               <a:buNone/>
             </a:pPr>
             <a:r>
@@ -7976,7 +7901,7 @@
           <a:bodyPr wrap="square" rtlCol="0" anchor="ctr"/>
           <a:lstStyle/>
           <a:p>
-            <a:pPr indent="0" marL="0">
+            <a:pPr marL="0" indent="0">
               <a:buNone/>
             </a:pPr>
             <a:r>
@@ -8012,7 +7937,7 @@
           <a:bodyPr wrap="square" rtlCol="0" anchor="ctr"/>
           <a:lstStyle/>
           <a:p>
-            <a:pPr algn="ctr" indent="0" marL="0">
+            <a:pPr marL="0" indent="0" algn="ctr">
               <a:buNone/>
             </a:pPr>
             <a:r>
@@ -8070,7 +7995,7 @@
           <a:bodyPr wrap="square" rtlCol="0" anchor="ctr"/>
           <a:lstStyle/>
           <a:p>
-            <a:pPr indent="0" marL="0">
+            <a:pPr marL="0" indent="0">
               <a:buNone/>
             </a:pPr>
             <a:r>
@@ -8106,7 +8031,7 @@
           <a:bodyPr wrap="square" rtlCol="0" anchor="ctr"/>
           <a:lstStyle/>
           <a:p>
-            <a:pPr indent="0" marL="0">
+            <a:pPr marL="0" indent="0">
               <a:buNone/>
             </a:pPr>
             <a:r>
@@ -8142,7 +8067,7 @@
           <a:bodyPr wrap="square" rtlCol="0" anchor="ctr"/>
           <a:lstStyle/>
           <a:p>
-            <a:pPr algn="ctr" indent="0" marL="0">
+            <a:pPr marL="0" indent="0" algn="ctr">
               <a:buNone/>
             </a:pPr>
             <a:r>
@@ -8200,7 +8125,7 @@
           <a:bodyPr wrap="square" rtlCol="0" anchor="ctr"/>
           <a:lstStyle/>
           <a:p>
-            <a:pPr indent="0" marL="0">
+            <a:pPr marL="0" indent="0">
               <a:buNone/>
             </a:pPr>
             <a:r>
@@ -8236,7 +8161,7 @@
           <a:bodyPr wrap="square" rtlCol="0" anchor="ctr"/>
           <a:lstStyle/>
           <a:p>
-            <a:pPr indent="0" marL="0">
+            <a:pPr marL="0" indent="0">
               <a:buNone/>
             </a:pPr>
             <a:r>
@@ -8272,7 +8197,7 @@
           <a:bodyPr wrap="square" rtlCol="0" anchor="ctr"/>
           <a:lstStyle/>
           <a:p>
-            <a:pPr algn="ctr" indent="0" marL="0">
+            <a:pPr marL="0" indent="0" algn="ctr">
               <a:buNone/>
             </a:pPr>
             <a:r>
@@ -8308,7 +8233,7 @@
           <a:bodyPr wrap="square" rtlCol="0" anchor="ctr"/>
           <a:lstStyle/>
           <a:p>
-            <a:pPr indent="0" marL="0">
+            <a:pPr marL="0" indent="0">
               <a:lnSpc>
                 <a:spcPts val="1500"/>
               </a:lnSpc>
@@ -8347,7 +8272,7 @@
           <a:bodyPr wrap="square" rtlCol="0" anchor="ctr"/>
           <a:lstStyle/>
           <a:p>
-            <a:pPr algn="r" indent="0" marL="0">
+            <a:pPr marL="0" indent="0" algn="r">
               <a:buNone/>
             </a:pPr>
             <a:r>
@@ -8378,6 +8303,7 @@
         <a:solidFill>
           <a:srgbClr val="16503C"/>
         </a:solidFill>
+        <a:effectLst/>
       </p:bgPr>
     </p:bg>
     <p:spTree>
@@ -8415,11 +8341,11 @@
           <a:bodyPr wrap="square" rtlCol="0" anchor="ctr"/>
           <a:lstStyle/>
           <a:p>
-            <a:pPr indent="0" marL="0">
-              <a:buNone/>
-            </a:pPr>
-            <a:r>
-              <a:rPr lang="en-US" sz="1300" b="1" spc="200" kern="0" dirty="0">
+            <a:pPr marL="0" indent="0">
+              <a:buNone/>
+            </a:pPr>
+            <a:r>
+              <a:rPr lang="en-US" sz="1300" b="1" kern="0" spc="200" dirty="0">
                 <a:solidFill>
                   <a:srgbClr val="8FB9A6"/>
                 </a:solidFill>
@@ -8454,7 +8380,7 @@
           <a:bodyPr wrap="square" rtlCol="0" anchor="ctr"/>
           <a:lstStyle/>
           <a:p>
-            <a:pPr indent="0" marL="0">
+            <a:pPr marL="0" indent="0">
               <a:buNone/>
             </a:pPr>
             <a:r>
@@ -8517,7 +8443,7 @@
           <a:bodyPr wrap="square" rtlCol="0" anchor="ctr"/>
           <a:lstStyle/>
           <a:p>
-            <a:pPr indent="0" marL="0">
+            <a:pPr marL="0" indent="0">
               <a:buNone/>
             </a:pPr>
             <a:r>
@@ -8553,7 +8479,7 @@
           <a:bodyPr wrap="square" rtlCol="0" anchor="ctr"/>
           <a:lstStyle/>
           <a:p>
-            <a:pPr indent="0" marL="0">
+            <a:pPr marL="0" indent="0">
               <a:lnSpc>
                 <a:spcPts val="1400"/>
               </a:lnSpc>
@@ -8616,7 +8542,7 @@
           <a:bodyPr wrap="square" rtlCol="0" anchor="ctr"/>
           <a:lstStyle/>
           <a:p>
-            <a:pPr indent="0" marL="0">
+            <a:pPr marL="0" indent="0">
               <a:buNone/>
             </a:pPr>
             <a:r>
@@ -8652,7 +8578,7 @@
           <a:bodyPr wrap="square" rtlCol="0" anchor="ctr"/>
           <a:lstStyle/>
           <a:p>
-            <a:pPr indent="0" marL="0">
+            <a:pPr marL="0" indent="0">
               <a:lnSpc>
                 <a:spcPts val="1400"/>
               </a:lnSpc>
@@ -8715,7 +8641,7 @@
           <a:bodyPr wrap="square" rtlCol="0" anchor="ctr"/>
           <a:lstStyle/>
           <a:p>
-            <a:pPr indent="0" marL="0">
+            <a:pPr marL="0" indent="0">
               <a:buNone/>
             </a:pPr>
             <a:r>
@@ -8751,7 +8677,7 @@
           <a:bodyPr wrap="square" rtlCol="0" anchor="ctr"/>
           <a:lstStyle/>
           <a:p>
-            <a:pPr indent="0" marL="0">
+            <a:pPr marL="0" indent="0">
               <a:lnSpc>
                 <a:spcPts val="1400"/>
               </a:lnSpc>
@@ -8814,7 +8740,7 @@
           <a:bodyPr wrap="square" rtlCol="0" anchor="ctr"/>
           <a:lstStyle/>
           <a:p>
-            <a:pPr indent="0" marL="0">
+            <a:pPr marL="0" indent="0">
               <a:buNone/>
             </a:pPr>
             <a:r>
@@ -8850,7 +8776,7 @@
           <a:bodyPr wrap="square" rtlCol="0" anchor="ctr"/>
           <a:lstStyle/>
           <a:p>
-            <a:pPr indent="0" marL="0">
+            <a:pPr marL="0" indent="0">
               <a:lnSpc>
                 <a:spcPts val="1400"/>
               </a:lnSpc>
@@ -8913,7 +8839,7 @@
           <a:bodyPr wrap="square" rtlCol="0" anchor="ctr"/>
           <a:lstStyle/>
           <a:p>
-            <a:pPr indent="0" marL="0">
+            <a:pPr marL="0" indent="0">
               <a:buNone/>
             </a:pPr>
             <a:r>
@@ -8949,7 +8875,7 @@
           <a:bodyPr wrap="square" rtlCol="0" anchor="ctr"/>
           <a:lstStyle/>
           <a:p>
-            <a:pPr indent="0" marL="0">
+            <a:pPr marL="0" indent="0">
               <a:lnSpc>
                 <a:spcPts val="1400"/>
               </a:lnSpc>
@@ -9012,7 +8938,7 @@
           <a:bodyPr wrap="square" rtlCol="0" anchor="ctr"/>
           <a:lstStyle/>
           <a:p>
-            <a:pPr indent="0" marL="0">
+            <a:pPr marL="0" indent="0">
               <a:buNone/>
             </a:pPr>
             <a:r>
@@ -9048,7 +8974,7 @@
           <a:bodyPr wrap="square" rtlCol="0" anchor="ctr"/>
           <a:lstStyle/>
           <a:p>
-            <a:pPr indent="0" marL="0">
+            <a:pPr marL="0" indent="0">
               <a:lnSpc>
                 <a:spcPts val="1400"/>
               </a:lnSpc>
@@ -9111,7 +9037,7 @@
           <a:bodyPr wrap="square" rtlCol="0" anchor="ctr"/>
           <a:lstStyle/>
           <a:p>
-            <a:pPr indent="0" marL="0">
+            <a:pPr marL="0" indent="0">
               <a:buNone/>
             </a:pPr>
             <a:r>
@@ -9147,7 +9073,7 @@
           <a:bodyPr wrap="square" rtlCol="0" anchor="ctr"/>
           <a:lstStyle/>
           <a:p>
-            <a:pPr indent="0" marL="0">
+            <a:pPr marL="0" indent="0">
               <a:lnSpc>
                 <a:spcPts val="1400"/>
               </a:lnSpc>
@@ -9210,7 +9136,7 @@
           <a:bodyPr wrap="square" rtlCol="0" anchor="ctr"/>
           <a:lstStyle/>
           <a:p>
-            <a:pPr indent="0" marL="0">
+            <a:pPr marL="0" indent="0">
               <a:buNone/>
             </a:pPr>
             <a:r>
@@ -9246,7 +9172,7 @@
           <a:bodyPr wrap="square" rtlCol="0" anchor="ctr"/>
           <a:lstStyle/>
           <a:p>
-            <a:pPr indent="0" marL="0">
+            <a:pPr marL="0" indent="0">
               <a:lnSpc>
                 <a:spcPts val="1400"/>
               </a:lnSpc>
@@ -9285,7 +9211,7 @@
           <a:bodyPr wrap="square" rtlCol="0" anchor="ctr"/>
           <a:lstStyle/>
           <a:p>
-            <a:pPr algn="r" indent="0" marL="0">
+            <a:pPr marL="0" indent="0" algn="r">
               <a:buNone/>
             </a:pPr>
             <a:r>
@@ -9601,4 +9527,299 @@
     </a:ext>
   </a:extLst>
 </a:theme>
+</file>
+
+<file path=ppt/theme/theme2.xml><?xml version="1.0" encoding="utf-8"?>
+<a:theme xmlns:a="http://schemas.openxmlformats.org/drawingml/2006/main" name="Office Theme">
+  <a:themeElements>
+    <a:clrScheme name="Office">
+      <a:dk1>
+        <a:sysClr val="windowText" lastClr="000000"/>
+      </a:dk1>
+      <a:lt1>
+        <a:sysClr val="window" lastClr="FFFFFF"/>
+      </a:lt1>
+      <a:dk2>
+        <a:srgbClr val="44546A"/>
+      </a:dk2>
+      <a:lt2>
+        <a:srgbClr val="E7E6E6"/>
+      </a:lt2>
+      <a:accent1>
+        <a:srgbClr val="4472C4"/>
+      </a:accent1>
+      <a:accent2>
+        <a:srgbClr val="ED7D31"/>
+      </a:accent2>
+      <a:accent3>
+        <a:srgbClr val="A5A5A5"/>
+      </a:accent3>
+      <a:accent4>
+        <a:srgbClr val="FFC000"/>
+      </a:accent4>
+      <a:accent5>
+        <a:srgbClr val="5B9BD5"/>
+      </a:accent5>
+      <a:accent6>
+        <a:srgbClr val="70AD47"/>
+      </a:accent6>
+      <a:hlink>
+        <a:srgbClr val="0563C1"/>
+      </a:hlink>
+      <a:folHlink>
+        <a:srgbClr val="954F72"/>
+      </a:folHlink>
+    </a:clrScheme>
+    <a:fontScheme name="Office">
+      <a:majorFont>
+        <a:latin typeface="Calibri Light" panose="020F0302020204030204"/>
+        <a:ea typeface=""/>
+        <a:cs typeface=""/>
+        <a:font script="Jpan" typeface="游ゴシック Light"/>
+        <a:font script="Hang" typeface="맑은 고딕"/>
+        <a:font script="Hans" typeface="等线 Light"/>
+        <a:font script="Hant" typeface="新細明體"/>
+        <a:font script="Arab" typeface="Times New Roman"/>
+        <a:font script="Hebr" typeface="Times New Roman"/>
+        <a:font script="Thai" typeface="Angsana New"/>
+        <a:font script="Ethi" typeface="Nyala"/>
+        <a:font script="Beng" typeface="Vrinda"/>
+        <a:font script="Gujr" typeface="Shruti"/>
+        <a:font script="Khmr" typeface="MoolBoran"/>
+        <a:font script="Knda" typeface="Tunga"/>
+        <a:font script="Guru" typeface="Raavi"/>
+        <a:font script="Cans" typeface="Euphemia"/>
+        <a:font script="Cher" typeface="Plantagenet Cherokee"/>
+        <a:font script="Yiii" typeface="Microsoft Yi Baiti"/>
+        <a:font script="Tibt" typeface="Microsoft Himalaya"/>
+        <a:font script="Thaa" typeface="MV Boli"/>
+        <a:font script="Deva" typeface="Mangal"/>
+        <a:font script="Telu" typeface="Gautami"/>
+        <a:font script="Taml" typeface="Latha"/>
+        <a:font script="Syrc" typeface="Estrangelo Edessa"/>
+        <a:font script="Orya" typeface="Kalinga"/>
+        <a:font script="Mlym" typeface="Kartika"/>
+        <a:font script="Laoo" typeface="DokChampa"/>
+        <a:font script="Sinh" typeface="Iskoola Pota"/>
+        <a:font script="Mong" typeface="Mongolian Baiti"/>
+        <a:font script="Viet" typeface="Times New Roman"/>
+        <a:font script="Uigh" typeface="Microsoft Uighur"/>
+        <a:font script="Geor" typeface="Sylfaen"/>
+        <a:font script="Armn" typeface="Arial"/>
+        <a:font script="Bugi" typeface="Leelawadee UI"/>
+        <a:font script="Bopo" typeface="Microsoft JhengHei"/>
+        <a:font script="Java" typeface="Javanese Text"/>
+        <a:font script="Lisu" typeface="Segoe UI"/>
+        <a:font script="Mymr" typeface="Myanmar Text"/>
+        <a:font script="Nkoo" typeface="Ebrima"/>
+        <a:font script="Olck" typeface="Nirmala UI"/>
+        <a:font script="Osma" typeface="Ebrima"/>
+        <a:font script="Phag" typeface="Phagspa"/>
+        <a:font script="Syrn" typeface="Estrangelo Edessa"/>
+        <a:font script="Syrj" typeface="Estrangelo Edessa"/>
+        <a:font script="Syre" typeface="Estrangelo Edessa"/>
+        <a:font script="Sora" typeface="Nirmala UI"/>
+        <a:font script="Tale" typeface="Microsoft Tai Le"/>
+        <a:font script="Talu" typeface="Microsoft New Tai Lue"/>
+        <a:font script="Tfng" typeface="Ebrima"/>
+      </a:majorFont>
+      <a:minorFont>
+        <a:latin typeface="Calibri" panose="020F0502020204030204"/>
+        <a:ea typeface=""/>
+        <a:cs typeface=""/>
+        <a:font script="Jpan" typeface="游ゴシック"/>
+        <a:font script="Hang" typeface="맑은 고딕"/>
+        <a:font script="Hans" typeface="等线"/>
+        <a:font script="Hant" typeface="新細明體"/>
+        <a:font script="Arab" typeface="Arial"/>
+        <a:font script="Hebr" typeface="Arial"/>
+        <a:font script="Thai" typeface="Cordia New"/>
+        <a:font script="Ethi" typeface="Nyala"/>
+        <a:font script="Beng" typeface="Vrinda"/>
+        <a:font script="Gujr" typeface="Shruti"/>
+        <a:font script="Khmr" typeface="DaunPenh"/>
+        <a:font script="Knda" typeface="Tunga"/>
+        <a:font script="Guru" typeface="Raavi"/>
+        <a:font script="Cans" typeface="Euphemia"/>
+        <a:font script="Cher" typeface="Plantagenet Cherokee"/>
+        <a:font script="Yiii" typeface="Microsoft Yi Baiti"/>
+        <a:font script="Tibt" typeface="Microsoft Himalaya"/>
+        <a:font script="Thaa" typeface="MV Boli"/>
+        <a:font script="Deva" typeface="Mangal"/>
+        <a:font script="Telu" typeface="Gautami"/>
+        <a:font script="Taml" typeface="Latha"/>
+        <a:font script="Syrc" typeface="Estrangelo Edessa"/>
+        <a:font script="Orya" typeface="Kalinga"/>
+        <a:font script="Mlym" typeface="Kartika"/>
+        <a:font script="Laoo" typeface="DokChampa"/>
+        <a:font script="Sinh" typeface="Iskoola Pota"/>
+        <a:font script="Mong" typeface="Mongolian Baiti"/>
+        <a:font script="Viet" typeface="Arial"/>
+        <a:font script="Uigh" typeface="Microsoft Uighur"/>
+        <a:font script="Geor" typeface="Sylfaen"/>
+        <a:font script="Armn" typeface="Arial"/>
+        <a:font script="Bugi" typeface="Leelawadee UI"/>
+        <a:font script="Bopo" typeface="Microsoft JhengHei"/>
+        <a:font script="Java" typeface="Javanese Text"/>
+        <a:font script="Lisu" typeface="Segoe UI"/>
+        <a:font script="Mymr" typeface="Myanmar Text"/>
+        <a:font script="Nkoo" typeface="Ebrima"/>
+        <a:font script="Olck" typeface="Nirmala UI"/>
+        <a:font script="Osma" typeface="Ebrima"/>
+        <a:font script="Phag" typeface="Phagspa"/>
+        <a:font script="Syrn" typeface="Estrangelo Edessa"/>
+        <a:font script="Syrj" typeface="Estrangelo Edessa"/>
+        <a:font script="Syre" typeface="Estrangelo Edessa"/>
+        <a:font script="Sora" typeface="Nirmala UI"/>
+        <a:font script="Tale" typeface="Microsoft Tai Le"/>
+        <a:font script="Talu" typeface="Microsoft New Tai Lue"/>
+        <a:font script="Tfng" typeface="Ebrima"/>
+      </a:minorFont>
+    </a:fontScheme>
+    <a:fmtScheme name="Office">
+      <a:fillStyleLst>
+        <a:solidFill>
+          <a:schemeClr val="phClr"/>
+        </a:solidFill>
+        <a:gradFill rotWithShape="1">
+          <a:gsLst>
+            <a:gs pos="0">
+              <a:schemeClr val="phClr">
+                <a:lumMod val="110000"/>
+                <a:satMod val="105000"/>
+                <a:tint val="67000"/>
+              </a:schemeClr>
+            </a:gs>
+            <a:gs pos="50000">
+              <a:schemeClr val="phClr">
+                <a:lumMod val="105000"/>
+                <a:satMod val="103000"/>
+                <a:tint val="73000"/>
+              </a:schemeClr>
+            </a:gs>
+            <a:gs pos="100000">
+              <a:schemeClr val="phClr">
+                <a:lumMod val="105000"/>
+                <a:satMod val="109000"/>
+                <a:tint val="81000"/>
+              </a:schemeClr>
+            </a:gs>
+          </a:gsLst>
+          <a:lin ang="5400000" scaled="0"/>
+        </a:gradFill>
+        <a:gradFill rotWithShape="1">
+          <a:gsLst>
+            <a:gs pos="0">
+              <a:schemeClr val="phClr">
+                <a:satMod val="103000"/>
+                <a:lumMod val="102000"/>
+                <a:tint val="94000"/>
+              </a:schemeClr>
+            </a:gs>
+            <a:gs pos="50000">
+              <a:schemeClr val="phClr">
+                <a:satMod val="110000"/>
+                <a:lumMod val="100000"/>
+                <a:shade val="100000"/>
+              </a:schemeClr>
+            </a:gs>
+            <a:gs pos="100000">
+              <a:schemeClr val="phClr">
+                <a:lumMod val="99000"/>
+                <a:satMod val="120000"/>
+                <a:shade val="78000"/>
+              </a:schemeClr>
+            </a:gs>
+          </a:gsLst>
+          <a:lin ang="5400000" scaled="0"/>
+        </a:gradFill>
+      </a:fillStyleLst>
+      <a:lnStyleLst>
+        <a:ln w="6350" cap="flat" cmpd="sng" algn="ctr">
+          <a:solidFill>
+            <a:schemeClr val="phClr"/>
+          </a:solidFill>
+          <a:prstDash val="solid"/>
+          <a:miter lim="800000"/>
+        </a:ln>
+        <a:ln w="12700" cap="flat" cmpd="sng" algn="ctr">
+          <a:solidFill>
+            <a:schemeClr val="phClr"/>
+          </a:solidFill>
+          <a:prstDash val="solid"/>
+          <a:miter lim="800000"/>
+        </a:ln>
+        <a:ln w="19050" cap="flat" cmpd="sng" algn="ctr">
+          <a:solidFill>
+            <a:schemeClr val="phClr"/>
+          </a:solidFill>
+          <a:prstDash val="solid"/>
+          <a:miter lim="800000"/>
+        </a:ln>
+      </a:lnStyleLst>
+      <a:effectStyleLst>
+        <a:effectStyle>
+          <a:effectLst/>
+        </a:effectStyle>
+        <a:effectStyle>
+          <a:effectLst/>
+        </a:effectStyle>
+        <a:effectStyle>
+          <a:effectLst>
+            <a:outerShdw blurRad="57150" dist="19050" dir="5400000" algn="ctr" rotWithShape="0">
+              <a:srgbClr val="000000">
+                <a:alpha val="63000"/>
+              </a:srgbClr>
+            </a:outerShdw>
+          </a:effectLst>
+        </a:effectStyle>
+      </a:effectStyleLst>
+      <a:bgFillStyleLst>
+        <a:solidFill>
+          <a:schemeClr val="phClr"/>
+        </a:solidFill>
+        <a:solidFill>
+          <a:schemeClr val="phClr">
+            <a:tint val="95000"/>
+            <a:satMod val="170000"/>
+          </a:schemeClr>
+        </a:solidFill>
+        <a:gradFill rotWithShape="1">
+          <a:gsLst>
+            <a:gs pos="0">
+              <a:schemeClr val="phClr">
+                <a:tint val="93000"/>
+                <a:satMod val="150000"/>
+                <a:shade val="98000"/>
+                <a:lumMod val="102000"/>
+              </a:schemeClr>
+            </a:gs>
+            <a:gs pos="50000">
+              <a:schemeClr val="phClr">
+                <a:tint val="98000"/>
+                <a:satMod val="130000"/>
+                <a:shade val="90000"/>
+                <a:lumMod val="103000"/>
+              </a:schemeClr>
+            </a:gs>
+            <a:gs pos="100000">
+              <a:schemeClr val="phClr">
+                <a:shade val="63000"/>
+                <a:satMod val="120000"/>
+              </a:schemeClr>
+            </a:gs>
+          </a:gsLst>
+          <a:lin ang="5400000" scaled="0"/>
+        </a:gradFill>
+      </a:bgFillStyleLst>
+    </a:fmtScheme>
+  </a:themeElements>
+  <a:objectDefaults/>
+  <a:extraClrSchemeLst/>
+  <a:extLst>
+    <a:ext uri="{05A4C25C-085E-4340-85A3-A5531E510DB2}">
+      <thm15:themeFamily xmlns:thm15="http://schemas.microsoft.com/office/thememl/2012/main" name="Office Theme" id="{62F939B6-93AF-4DB8-9C6B-D6C7DFDC589F}" vid="{4A3C46E8-61CC-4603-A589-7422A47A8E4A}"/>
+    </a:ext>
+  </a:extLst>
+</a:theme>
 </file>